--- a/docs/migration-orders/DavinTrade-Rise-Money-Service-Stacks.pptx
+++ b/docs/migration-orders/DavinTrade-Rise-Money-Service-Stacks.pptx
@@ -5,10 +5,11 @@
     <p:sldMasterId id="2147483648" r:id="rId1"/>
   </p:sldMasterIdLst>
   <p:notesMasterIdLst>
-    <p:notesMasterId r:id="rId3"/>
+    <p:notesMasterId r:id="rId4"/>
   </p:notesMasterIdLst>
   <p:sldIdLst>
     <p:sldId id="262" r:id="rId2"/>
+    <p:sldId id="263" r:id="rId3"/>
   </p:sldIdLst>
   <p:sldSz cx="12192000" cy="6858000"/>
   <p:notesSz cx="6858000" cy="12192000"/>
@@ -312,6 +313,90 @@
     <p:extLst>
       <p:ext uri="{BB962C8B-B14F-4D97-AF65-F5344CB8AC3E}">
         <p14:creationId xmlns:p14="http://schemas.microsoft.com/office/powerpoint/2010/main" val="1024086991"/>
+      </p:ext>
+    </p:extLst>
+  </p:cSld>
+  <p:clrMapOvr>
+    <a:masterClrMapping/>
+  </p:clrMapOvr>
+</p:notes>
+</file>
+
+<file path=ppt/notesSlides/notesSlide2.xml><?xml version="1.0" encoding="utf-8"?>
+<p:notes xmlns:a="http://schemas.openxmlformats.org/drawingml/2006/main" xmlns:r="http://schemas.openxmlformats.org/officeDocument/2006/relationships" xmlns:p="http://schemas.openxmlformats.org/presentationml/2006/main">
+  <p:cSld>
+    <p:spTree>
+      <p:nvGrpSpPr>
+        <p:cNvPr id="1" name=""/>
+        <p:cNvGrpSpPr/>
+        <p:nvPr/>
+      </p:nvGrpSpPr>
+      <p:grpSpPr>
+        <a:xfrm>
+          <a:off x="0" y="0"/>
+          <a:ext cx="0" cy="0"/>
+          <a:chOff x="0" y="0"/>
+          <a:chExt cx="0" cy="0"/>
+        </a:xfrm>
+      </p:grpSpPr>
+      <p:sp>
+        <p:nvSpPr>
+          <p:cNvPr id="2" name="Slide Image Placeholder 1"/>
+          <p:cNvSpPr>
+            <a:spLocks noGrp="1" noRot="1" noChangeAspect="1"/>
+          </p:cNvSpPr>
+          <p:nvPr>
+            <p:ph type="sldImg"/>
+          </p:nvPr>
+        </p:nvSpPr>
+        <p:spPr/>
+      </p:sp>
+      <p:sp>
+        <p:nvSpPr>
+          <p:cNvPr id="3" name="Notes Placeholder 2"/>
+          <p:cNvSpPr>
+            <a:spLocks noGrp="1"/>
+          </p:cNvSpPr>
+          <p:nvPr>
+            <p:ph type="body" idx="1"/>
+          </p:nvPr>
+        </p:nvSpPr>
+        <p:spPr/>
+        <p:txBody>
+          <a:bodyPr/>
+          <a:lstStyle/>
+          <a:p>
+            <a:endParaRPr lang="en-US" dirty="0"/>
+          </a:p>
+        </p:txBody>
+      </p:sp>
+      <p:sp>
+        <p:nvSpPr>
+          <p:cNvPr id="4" name="Slide Number Placeholder 3"/>
+          <p:cNvSpPr>
+            <a:spLocks noGrp="1"/>
+          </p:cNvSpPr>
+          <p:nvPr>
+            <p:ph type="sldNum" sz="quarter" idx="10"/>
+          </p:nvPr>
+        </p:nvSpPr>
+        <p:spPr/>
+        <p:txBody>
+          <a:bodyPr/>
+          <a:lstStyle/>
+          <a:p>
+            <a:fld id="{F7021451-1387-4CA6-816F-3879F97B5CBC}" type="slidenum">
+              <a:rPr lang="en-US"/>
+              <a:t>2</a:t>
+            </a:fld>
+            <a:endParaRPr lang="en-US"/>
+          </a:p>
+        </p:txBody>
+      </p:sp>
+    </p:spTree>
+    <p:extLst>
+      <p:ext uri="{BB962C8B-B14F-4D97-AF65-F5344CB8AC3E}">
+        <p14:creationId xmlns:p14="http://schemas.microsoft.com/office/powerpoint/2010/main" val="3147965558"/>
       </p:ext>
     </p:extLst>
   </p:cSld>
@@ -1954,7 +2039,7 @@
         </p:blipFill>
         <p:spPr>
           <a:xfrm>
-            <a:off x="9275003" y="3834412"/>
+            <a:off x="9311209" y="3221997"/>
             <a:ext cx="594361" cy="594361"/>
           </a:xfrm>
           <a:prstGeom prst="rect">
@@ -2299,14 +2384,14 @@
             </a:extLst>
           </p:cNvPr>
           <p:cNvCxnSpPr>
-            <a:endCxn id="34" idx="2"/>
+            <a:cxnSpLocks/>
           </p:cNvCxnSpPr>
           <p:nvPr/>
         </p:nvCxnSpPr>
         <p:spPr>
           <a:xfrm flipV="1">
-            <a:off x="8475784" y="2926080"/>
-            <a:ext cx="1733492" cy="1828800"/>
+            <a:off x="7866119" y="952734"/>
+            <a:ext cx="1161283" cy="2959580"/>
           </a:xfrm>
           <a:prstGeom prst="straightConnector1">
             <a:avLst/>
@@ -2724,7 +2809,7 @@
         </p:nvSpPr>
         <p:spPr>
           <a:xfrm>
-            <a:off x="3312326" y="1862181"/>
+            <a:off x="3313393" y="1844268"/>
             <a:ext cx="1745272" cy="415498"/>
           </a:xfrm>
           <a:prstGeom prst="rect">
@@ -2751,7 +2836,9 @@
               <a:rPr lang="en-US" sz="700" b="1" dirty="0">
                 <a:ln/>
                 <a:solidFill>
-                  <a:schemeClr val="accent4"/>
+                  <a:schemeClr val="accent2">
+                    <a:lumMod val="50000"/>
+                  </a:schemeClr>
                 </a:solidFill>
               </a:rPr>
               <a:t>Transfer USD received from Stripe to SCB (either manual transfer by Davin or automatic transfer from Stripe to SCB)</a:t>
@@ -2759,7 +2846,9 @@
             <a:endParaRPr lang="en-TZ" sz="700" b="1" dirty="0">
               <a:ln/>
               <a:solidFill>
-                <a:schemeClr val="accent4"/>
+                <a:schemeClr val="accent2">
+                  <a:lumMod val="50000"/>
+                </a:schemeClr>
               </a:solidFill>
             </a:endParaRPr>
           </a:p>
@@ -2806,7 +2895,9 @@
               <a:rPr lang="en-US" sz="700" b="1" dirty="0">
                 <a:ln/>
                 <a:solidFill>
-                  <a:schemeClr val="accent4"/>
+                  <a:schemeClr val="accent2">
+                    <a:lumMod val="50000"/>
+                  </a:schemeClr>
                 </a:solidFill>
               </a:rPr>
               <a:t>Transfer USD received from </a:t>
@@ -2815,7 +2906,9 @@
               <a:rPr lang="en-US" sz="700" b="1" dirty="0" err="1">
                 <a:ln/>
                 <a:solidFill>
-                  <a:schemeClr val="accent4"/>
+                  <a:schemeClr val="accent2">
+                    <a:lumMod val="50000"/>
+                  </a:schemeClr>
                 </a:solidFill>
               </a:rPr>
               <a:t>dLocal</a:t>
@@ -2824,7 +2917,9 @@
               <a:rPr lang="en-US" sz="700" b="1" dirty="0">
                 <a:ln/>
                 <a:solidFill>
-                  <a:schemeClr val="accent4"/>
+                  <a:schemeClr val="accent2">
+                    <a:lumMod val="50000"/>
+                  </a:schemeClr>
                 </a:solidFill>
               </a:rPr>
               <a:t> to SCB (either manual transfer by Davin or automatic transfer from </a:t>
@@ -2833,7 +2928,9 @@
               <a:rPr lang="en-US" sz="700" b="1" dirty="0" err="1">
                 <a:ln/>
                 <a:solidFill>
-                  <a:schemeClr val="accent4"/>
+                  <a:schemeClr val="accent2">
+                    <a:lumMod val="50000"/>
+                  </a:schemeClr>
                 </a:solidFill>
               </a:rPr>
               <a:t>dLocal</a:t>
@@ -2842,7 +2939,9 @@
               <a:rPr lang="en-US" sz="700" b="1" dirty="0">
                 <a:ln/>
                 <a:solidFill>
-                  <a:schemeClr val="accent4"/>
+                  <a:schemeClr val="accent2">
+                    <a:lumMod val="50000"/>
+                  </a:schemeClr>
                 </a:solidFill>
               </a:rPr>
               <a:t> to SCB)</a:t>
@@ -2850,7 +2949,9 @@
             <a:endParaRPr lang="en-TZ" sz="700" b="1" dirty="0">
               <a:ln/>
               <a:solidFill>
-                <a:schemeClr val="accent4"/>
+                <a:schemeClr val="accent2">
+                  <a:lumMod val="50000"/>
+                </a:schemeClr>
               </a:solidFill>
             </a:endParaRPr>
           </a:p>
@@ -2869,9 +2970,9 @@
           <p:nvPr/>
         </p:nvSpPr>
         <p:spPr>
-          <a:xfrm rot="18861997">
-            <a:off x="8541309" y="3394986"/>
-            <a:ext cx="1555835" cy="415498"/>
+          <a:xfrm rot="17506784">
+            <a:off x="7865144" y="2579364"/>
+            <a:ext cx="1319905" cy="307777"/>
           </a:xfrm>
           <a:prstGeom prst="rect">
             <a:avLst/>
@@ -2897,15 +2998,19 @@
               <a:rPr lang="en-US" sz="700" b="1" dirty="0">
                 <a:ln/>
                 <a:solidFill>
-                  <a:schemeClr val="accent4"/>
+                  <a:schemeClr val="accent2">
+                    <a:lumMod val="50000"/>
+                  </a:schemeClr>
                 </a:solidFill>
               </a:rPr>
-              <a:t>Transfer USD received from SCB to Wise (manual transfer by Davin Only)</a:t>
+              <a:t>Transfer money from SCB to Money Transfer Agent</a:t>
             </a:r>
             <a:endParaRPr lang="en-TZ" sz="700" b="1" dirty="0">
               <a:ln/>
               <a:solidFill>
-                <a:schemeClr val="accent4"/>
+                <a:schemeClr val="accent2">
+                  <a:lumMod val="50000"/>
+                </a:schemeClr>
               </a:solidFill>
             </a:endParaRPr>
           </a:p>
@@ -2954,83 +3059,6 @@
                 <a:schemeClr val="accent5">
                   <a:lumMod val="75000"/>
                 </a:schemeClr>
-              </a:solidFill>
-            </a:endParaRPr>
-          </a:p>
-        </p:txBody>
-      </p:sp>
-      <p:sp>
-        <p:nvSpPr>
-          <p:cNvPr id="100" name="TextBox 99">
-            <a:extLst>
-              <a:ext uri="{FF2B5EF4-FFF2-40B4-BE49-F238E27FC236}">
-                <a16:creationId xmlns:a16="http://schemas.microsoft.com/office/drawing/2014/main" id="{2E1C6C62-0200-4C11-AF24-BEC4ACE6DD1C}"/>
-              </a:ext>
-            </a:extLst>
-          </p:cNvPr>
-          <p:cNvSpPr txBox="1"/>
-          <p:nvPr/>
-        </p:nvSpPr>
-        <p:spPr>
-          <a:xfrm>
-            <a:off x="10176033" y="3392968"/>
-            <a:ext cx="1620512" cy="1384995"/>
-          </a:xfrm>
-          <a:prstGeom prst="rect">
-            <a:avLst/>
-          </a:prstGeom>
-          <a:noFill/>
-        </p:spPr>
-        <p:txBody>
-          <a:bodyPr wrap="square" rtlCol="0">
-            <a:spAutoFit/>
-            <a:scene3d>
-              <a:camera prst="orthographicFront"/>
-              <a:lightRig rig="soft" dir="t">
-                <a:rot lat="0" lon="0" rev="15600000"/>
-              </a:lightRig>
-            </a:scene3d>
-            <a:sp3d extrusionH="57150" prstMaterial="softEdge">
-              <a:bevelT w="25400" h="38100"/>
-            </a:sp3d>
-          </a:bodyPr>
-          <a:lstStyle/>
-          <a:p>
-            <a:r>
-              <a:rPr lang="en-US" sz="1050" b="1" dirty="0">
-                <a:ln/>
-                <a:solidFill>
-                  <a:schemeClr val="accent4"/>
-                </a:solidFill>
-              </a:rPr>
-              <a:t>Money sending to Bank’s Account of Affiliates</a:t>
-            </a:r>
-          </a:p>
-          <a:p>
-            <a:r>
-              <a:rPr lang="en-US" sz="1050" b="1" dirty="0">
-                <a:ln/>
-                <a:solidFill>
-                  <a:schemeClr val="accent4"/>
-                </a:solidFill>
-              </a:rPr>
-              <a:t>Note : 1) Disbursement is immediately made after Wise was funded. 2)</a:t>
-            </a:r>
-          </a:p>
-          <a:p>
-            <a:r>
-              <a:rPr lang="en-US" sz="1050" b="1" dirty="0">
-                <a:ln/>
-                <a:solidFill>
-                  <a:schemeClr val="accent4"/>
-                </a:solidFill>
-              </a:rPr>
-              <a:t>Affiliates bear exchange rate difference and money transfer fees.</a:t>
-            </a:r>
-            <a:endParaRPr lang="en-TZ" sz="1050" b="1" dirty="0">
-              <a:ln/>
-              <a:solidFill>
-                <a:schemeClr val="accent4"/>
               </a:solidFill>
             </a:endParaRPr>
           </a:p>
@@ -3082,14 +3110,15 @@
             </a:extLst>
           </p:cNvPr>
           <p:cNvCxnSpPr>
+            <a:cxnSpLocks/>
             <a:endCxn id="79" idx="0"/>
           </p:cNvCxnSpPr>
           <p:nvPr/>
         </p:nvCxnSpPr>
         <p:spPr>
           <a:xfrm>
-            <a:off x="10774703" y="4814316"/>
-            <a:ext cx="0" cy="170154"/>
+            <a:off x="10774703" y="4593297"/>
+            <a:ext cx="0" cy="391173"/>
           </a:xfrm>
           <a:prstGeom prst="straightConnector1">
             <a:avLst/>
@@ -3113,7 +3142,2786 @@
           </a:fontRef>
         </p:style>
       </p:cxnSp>
+      <p:sp>
+        <p:nvSpPr>
+          <p:cNvPr id="66" name="Shape 27">
+            <a:extLst>
+              <a:ext uri="{FF2B5EF4-FFF2-40B4-BE49-F238E27FC236}">
+                <a16:creationId xmlns:a16="http://schemas.microsoft.com/office/drawing/2014/main" id="{8BBF809E-A152-43F7-BD36-D98A9429844E}"/>
+              </a:ext>
+            </a:extLst>
+          </p:cNvPr>
+          <p:cNvSpPr/>
+          <p:nvPr/>
+        </p:nvSpPr>
+        <p:spPr>
+          <a:xfrm>
+            <a:off x="7652034" y="135208"/>
+            <a:ext cx="2286000" cy="778225"/>
+          </a:xfrm>
+          <a:prstGeom prst="roundRect">
+            <a:avLst>
+              <a:gd name="adj" fmla="val 5000"/>
+            </a:avLst>
+          </a:prstGeom>
+          <a:solidFill>
+            <a:srgbClr val="F3F6F8"/>
+          </a:solidFill>
+          <a:ln/>
+          <a:effectLst>
+            <a:outerShdw blurRad="88900" dist="25400" dir="5400000" algn="bl" rotWithShape="0">
+              <a:srgbClr val="1A2A44">
+                <a:alpha val="18000"/>
+              </a:srgbClr>
+            </a:outerShdw>
+          </a:effectLst>
+        </p:spPr>
+        <p:txBody>
+          <a:bodyPr/>
+          <a:lstStyle/>
+          <a:p>
+            <a:endParaRPr lang="en-TZ" dirty="0"/>
+          </a:p>
+        </p:txBody>
+      </p:sp>
+      <p:sp>
+        <p:nvSpPr>
+          <p:cNvPr id="67" name="Shape 28">
+            <a:extLst>
+              <a:ext uri="{FF2B5EF4-FFF2-40B4-BE49-F238E27FC236}">
+                <a16:creationId xmlns:a16="http://schemas.microsoft.com/office/drawing/2014/main" id="{87297200-4F60-495B-BF5C-83C7168543CC}"/>
+              </a:ext>
+            </a:extLst>
+          </p:cNvPr>
+          <p:cNvSpPr/>
+          <p:nvPr/>
+        </p:nvSpPr>
+        <p:spPr>
+          <a:xfrm>
+            <a:off x="8626754" y="190830"/>
+            <a:ext cx="384048" cy="384048"/>
+          </a:xfrm>
+          <a:prstGeom prst="ellipse">
+            <a:avLst/>
+          </a:prstGeom>
+          <a:solidFill>
+            <a:srgbClr val="0E7C86"/>
+          </a:solidFill>
+          <a:ln/>
+        </p:spPr>
+        <p:txBody>
+          <a:bodyPr/>
+          <a:lstStyle/>
+          <a:p>
+            <a:r>
+              <a:rPr lang="en-US" sz="1600" b="1" dirty="0">
+                <a:solidFill>
+                  <a:schemeClr val="bg1"/>
+                </a:solidFill>
+              </a:rPr>
+              <a:t>A</a:t>
+            </a:r>
+            <a:endParaRPr lang="en-TZ" sz="1600" b="1" dirty="0">
+              <a:solidFill>
+                <a:schemeClr val="bg1"/>
+              </a:solidFill>
+            </a:endParaRPr>
+          </a:p>
+        </p:txBody>
+      </p:sp>
+      <p:sp>
+        <p:nvSpPr>
+          <p:cNvPr id="73" name="Text 30">
+            <a:extLst>
+              <a:ext uri="{FF2B5EF4-FFF2-40B4-BE49-F238E27FC236}">
+                <a16:creationId xmlns:a16="http://schemas.microsoft.com/office/drawing/2014/main" id="{3A4E7C79-0CF4-4EA8-AEFE-AF9A68EED069}"/>
+              </a:ext>
+            </a:extLst>
+          </p:cNvPr>
+          <p:cNvSpPr/>
+          <p:nvPr/>
+        </p:nvSpPr>
+        <p:spPr>
+          <a:xfrm>
+            <a:off x="7767218" y="628267"/>
+            <a:ext cx="2103120" cy="365760"/>
+          </a:xfrm>
+          <a:prstGeom prst="rect">
+            <a:avLst/>
+          </a:prstGeom>
+          <a:noFill/>
+          <a:ln/>
+        </p:spPr>
+        <p:txBody>
+          <a:bodyPr wrap="square" lIns="0" tIns="0" rIns="0" bIns="0" rtlCol="0" anchor="t"/>
+          <a:lstStyle/>
+          <a:p>
+            <a:pPr marL="0" indent="0" algn="ctr">
+              <a:buNone/>
+            </a:pPr>
+            <a:r>
+              <a:rPr lang="en-US" sz="1050" b="1" dirty="0">
+                <a:solidFill>
+                  <a:srgbClr val="12203D"/>
+                </a:solidFill>
+                <a:latin typeface="Calibri" pitchFamily="34" charset="0"/>
+                <a:cs typeface="Calibri" pitchFamily="34" charset="-120"/>
+              </a:rPr>
+              <a:t>International Money Transfer Agent</a:t>
+            </a:r>
+            <a:endParaRPr lang="en-US" sz="1050" dirty="0"/>
+          </a:p>
+        </p:txBody>
+      </p:sp>
+      <p:cxnSp>
+        <p:nvCxnSpPr>
+          <p:cNvPr id="39" name="Straight Arrow Connector 38">
+            <a:extLst>
+              <a:ext uri="{FF2B5EF4-FFF2-40B4-BE49-F238E27FC236}">
+                <a16:creationId xmlns:a16="http://schemas.microsoft.com/office/drawing/2014/main" id="{10BC582E-1674-41E6-9A96-B3FA0F4601F3}"/>
+              </a:ext>
+            </a:extLst>
+          </p:cNvPr>
+          <p:cNvCxnSpPr/>
+          <p:nvPr/>
+        </p:nvCxnSpPr>
+        <p:spPr>
+          <a:xfrm>
+            <a:off x="9443277" y="952734"/>
+            <a:ext cx="198706" cy="327426"/>
+          </a:xfrm>
+          <a:prstGeom prst="straightConnector1">
+            <a:avLst/>
+          </a:prstGeom>
+          <a:ln>
+            <a:tailEnd type="triangle"/>
+          </a:ln>
+        </p:spPr>
+        <p:style>
+          <a:lnRef idx="3">
+            <a:schemeClr val="accent2"/>
+          </a:lnRef>
+          <a:fillRef idx="0">
+            <a:schemeClr val="accent2"/>
+          </a:fillRef>
+          <a:effectRef idx="2">
+            <a:schemeClr val="accent2"/>
+          </a:effectRef>
+          <a:fontRef idx="minor">
+            <a:schemeClr val="tx1"/>
+          </a:fontRef>
+        </p:style>
+      </p:cxnSp>
+      <p:sp>
+        <p:nvSpPr>
+          <p:cNvPr id="75" name="TextBox 74">
+            <a:extLst>
+              <a:ext uri="{FF2B5EF4-FFF2-40B4-BE49-F238E27FC236}">
+                <a16:creationId xmlns:a16="http://schemas.microsoft.com/office/drawing/2014/main" id="{FA6212FF-8DB0-44F7-BA27-4504E7E6493B}"/>
+              </a:ext>
+            </a:extLst>
+          </p:cNvPr>
+          <p:cNvSpPr txBox="1"/>
+          <p:nvPr/>
+        </p:nvSpPr>
+        <p:spPr>
+          <a:xfrm>
+            <a:off x="9542630" y="989753"/>
+            <a:ext cx="1745272" cy="200055"/>
+          </a:xfrm>
+          <a:prstGeom prst="rect">
+            <a:avLst/>
+          </a:prstGeom>
+          <a:noFill/>
+        </p:spPr>
+        <p:txBody>
+          <a:bodyPr wrap="square" rtlCol="0">
+            <a:spAutoFit/>
+            <a:scene3d>
+              <a:camera prst="orthographicFront"/>
+              <a:lightRig rig="soft" dir="t">
+                <a:rot lat="0" lon="0" rev="15600000"/>
+              </a:lightRig>
+            </a:scene3d>
+            <a:sp3d extrusionH="57150" prstMaterial="softEdge">
+              <a:bevelT w="25400" h="38100"/>
+            </a:sp3d>
+          </a:bodyPr>
+          <a:lstStyle/>
+          <a:p>
+            <a:r>
+              <a:rPr lang="en-US" sz="700" b="1" dirty="0">
+                <a:ln/>
+                <a:solidFill>
+                  <a:schemeClr val="accent2">
+                    <a:lumMod val="50000"/>
+                  </a:schemeClr>
+                </a:solidFill>
+              </a:rPr>
+              <a:t>Wise is paid by Money Transfer Agent</a:t>
+            </a:r>
+            <a:endParaRPr lang="en-TZ" sz="700" b="1" dirty="0">
+              <a:ln/>
+              <a:solidFill>
+                <a:schemeClr val="accent2">
+                  <a:lumMod val="50000"/>
+                </a:schemeClr>
+              </a:solidFill>
+            </a:endParaRPr>
+          </a:p>
+        </p:txBody>
+      </p:sp>
+      <p:cxnSp>
+        <p:nvCxnSpPr>
+          <p:cNvPr id="47" name="Straight Arrow Connector 46">
+            <a:extLst>
+              <a:ext uri="{FF2B5EF4-FFF2-40B4-BE49-F238E27FC236}">
+                <a16:creationId xmlns:a16="http://schemas.microsoft.com/office/drawing/2014/main" id="{AC3A89D9-3D4F-4F12-8F5B-743625E2748E}"/>
+              </a:ext>
+            </a:extLst>
+          </p:cNvPr>
+          <p:cNvCxnSpPr>
+            <a:stCxn id="45" idx="0"/>
+          </p:cNvCxnSpPr>
+          <p:nvPr/>
+        </p:nvCxnSpPr>
+        <p:spPr>
+          <a:xfrm flipH="1" flipV="1">
+            <a:off x="9608389" y="2958612"/>
+            <a:ext cx="1" cy="263385"/>
+          </a:xfrm>
+          <a:prstGeom prst="straightConnector1">
+            <a:avLst/>
+          </a:prstGeom>
+          <a:ln>
+            <a:tailEnd type="triangle"/>
+          </a:ln>
+        </p:spPr>
+        <p:style>
+          <a:lnRef idx="3">
+            <a:schemeClr val="accent1"/>
+          </a:lnRef>
+          <a:fillRef idx="0">
+            <a:schemeClr val="accent1"/>
+          </a:fillRef>
+          <a:effectRef idx="2">
+            <a:schemeClr val="accent1"/>
+          </a:effectRef>
+          <a:fontRef idx="minor">
+            <a:schemeClr val="tx1"/>
+          </a:fontRef>
+        </p:style>
+      </p:cxnSp>
+      <p:sp>
+        <p:nvSpPr>
+          <p:cNvPr id="78" name="TextBox 77">
+            <a:extLst>
+              <a:ext uri="{FF2B5EF4-FFF2-40B4-BE49-F238E27FC236}">
+                <a16:creationId xmlns:a16="http://schemas.microsoft.com/office/drawing/2014/main" id="{7E4D933D-3794-4E87-BC3A-ED8AF873B206}"/>
+              </a:ext>
+            </a:extLst>
+          </p:cNvPr>
+          <p:cNvSpPr txBox="1"/>
+          <p:nvPr/>
+        </p:nvSpPr>
+        <p:spPr>
+          <a:xfrm>
+            <a:off x="9641983" y="2977332"/>
+            <a:ext cx="1208941" cy="307777"/>
+          </a:xfrm>
+          <a:prstGeom prst="rect">
+            <a:avLst/>
+          </a:prstGeom>
+          <a:noFill/>
+        </p:spPr>
+        <p:txBody>
+          <a:bodyPr wrap="square" rtlCol="0">
+            <a:spAutoFit/>
+          </a:bodyPr>
+          <a:lstStyle/>
+          <a:p>
+            <a:r>
+              <a:rPr lang="en-US" sz="700" dirty="0">
+                <a:solidFill>
+                  <a:schemeClr val="accent5">
+                    <a:lumMod val="75000"/>
+                  </a:schemeClr>
+                </a:solidFill>
+              </a:rPr>
+              <a:t>Operate Wise Balance account By Davin</a:t>
+            </a:r>
+            <a:endParaRPr lang="en-TZ" sz="700" dirty="0">
+              <a:solidFill>
+                <a:schemeClr val="accent5">
+                  <a:lumMod val="75000"/>
+                </a:schemeClr>
+              </a:solidFill>
+            </a:endParaRPr>
+          </a:p>
+        </p:txBody>
+      </p:sp>
+      <p:sp>
+        <p:nvSpPr>
+          <p:cNvPr id="80" name="TextBox 79">
+            <a:extLst>
+              <a:ext uri="{FF2B5EF4-FFF2-40B4-BE49-F238E27FC236}">
+                <a16:creationId xmlns:a16="http://schemas.microsoft.com/office/drawing/2014/main" id="{47447826-C826-43DA-A9CC-1BAF5785A801}"/>
+              </a:ext>
+            </a:extLst>
+          </p:cNvPr>
+          <p:cNvSpPr txBox="1"/>
+          <p:nvPr/>
+        </p:nvSpPr>
+        <p:spPr>
+          <a:xfrm>
+            <a:off x="10176033" y="3392968"/>
+            <a:ext cx="1620512" cy="1200329"/>
+          </a:xfrm>
+          <a:prstGeom prst="rect">
+            <a:avLst/>
+          </a:prstGeom>
+          <a:noFill/>
+        </p:spPr>
+        <p:txBody>
+          <a:bodyPr wrap="square" rtlCol="0">
+            <a:spAutoFit/>
+            <a:scene3d>
+              <a:camera prst="orthographicFront"/>
+              <a:lightRig rig="soft" dir="t">
+                <a:rot lat="0" lon="0" rev="15600000"/>
+              </a:lightRig>
+            </a:scene3d>
+            <a:sp3d extrusionH="57150" prstMaterial="softEdge">
+              <a:bevelT w="25400" h="38100"/>
+            </a:sp3d>
+          </a:bodyPr>
+          <a:lstStyle/>
+          <a:p>
+            <a:r>
+              <a:rPr lang="en-US" sz="900" b="1" dirty="0">
+                <a:ln/>
+                <a:solidFill>
+                  <a:schemeClr val="accent2">
+                    <a:lumMod val="50000"/>
+                  </a:schemeClr>
+                </a:solidFill>
+              </a:rPr>
+              <a:t>Money sending to Bank’s Account of Affiliates</a:t>
+            </a:r>
+          </a:p>
+          <a:p>
+            <a:r>
+              <a:rPr lang="en-US" sz="900" b="1" dirty="0">
+                <a:ln/>
+                <a:solidFill>
+                  <a:schemeClr val="accent2">
+                    <a:lumMod val="50000"/>
+                  </a:schemeClr>
+                </a:solidFill>
+              </a:rPr>
+              <a:t>Note : 1) Disbursement is made as per schedule AND 2)</a:t>
+            </a:r>
+          </a:p>
+          <a:p>
+            <a:r>
+              <a:rPr lang="en-US" sz="900" b="1" dirty="0">
+                <a:ln/>
+                <a:solidFill>
+                  <a:schemeClr val="accent2">
+                    <a:lumMod val="50000"/>
+                  </a:schemeClr>
+                </a:solidFill>
+              </a:rPr>
+              <a:t>Affiliates are paid in local currencies and bear exchange rate difference and money transfer fees.</a:t>
+            </a:r>
+            <a:endParaRPr lang="en-TZ" sz="900" b="1" dirty="0">
+              <a:ln/>
+              <a:solidFill>
+                <a:schemeClr val="accent2">
+                  <a:lumMod val="50000"/>
+                </a:schemeClr>
+              </a:solidFill>
+            </a:endParaRPr>
+          </a:p>
+        </p:txBody>
+      </p:sp>
     </p:spTree>
+  </p:cSld>
+  <p:clrMapOvr>
+    <a:masterClrMapping/>
+  </p:clrMapOvr>
+</p:sld>
+</file>
+
+<file path=ppt/slides/slide2.xml><?xml version="1.0" encoding="utf-8"?>
+<p:sld xmlns:a="http://schemas.openxmlformats.org/drawingml/2006/main" xmlns:r="http://schemas.openxmlformats.org/officeDocument/2006/relationships" xmlns:p="http://schemas.openxmlformats.org/presentationml/2006/main">
+  <p:cSld>
+    <p:spTree>
+      <p:nvGrpSpPr>
+        <p:cNvPr id="1" name=""/>
+        <p:cNvGrpSpPr/>
+        <p:nvPr/>
+      </p:nvGrpSpPr>
+      <p:grpSpPr>
+        <a:xfrm>
+          <a:off x="0" y="0"/>
+          <a:ext cx="0" cy="0"/>
+          <a:chOff x="0" y="0"/>
+          <a:chExt cx="0" cy="0"/>
+        </a:xfrm>
+      </p:grpSpPr>
+      <p:sp>
+        <p:nvSpPr>
+          <p:cNvPr id="5" name="Shape 3"/>
+          <p:cNvSpPr/>
+          <p:nvPr/>
+        </p:nvSpPr>
+        <p:spPr>
+          <a:xfrm>
+            <a:off x="2756916" y="2103120"/>
+            <a:ext cx="320040" cy="0"/>
+          </a:xfrm>
+          <a:prstGeom prst="line">
+            <a:avLst/>
+          </a:prstGeom>
+          <a:ln>
+            <a:tailEnd type="none"/>
+          </a:ln>
+        </p:spPr>
+        <p:style>
+          <a:lnRef idx="3">
+            <a:schemeClr val="accent5"/>
+          </a:lnRef>
+          <a:fillRef idx="0">
+            <a:schemeClr val="accent5"/>
+          </a:fillRef>
+          <a:effectRef idx="2">
+            <a:schemeClr val="accent5"/>
+          </a:effectRef>
+          <a:fontRef idx="minor">
+            <a:schemeClr val="tx1"/>
+          </a:fontRef>
+        </p:style>
+      </p:sp>
+      <p:sp>
+        <p:nvSpPr>
+          <p:cNvPr id="6" name="Shape 4"/>
+          <p:cNvSpPr/>
+          <p:nvPr/>
+        </p:nvSpPr>
+        <p:spPr>
+          <a:xfrm>
+            <a:off x="3076956" y="1005840"/>
+            <a:ext cx="0" cy="2194560"/>
+          </a:xfrm>
+          <a:prstGeom prst="line">
+            <a:avLst/>
+          </a:prstGeom>
+          <a:ln>
+            <a:tailEnd type="none"/>
+          </a:ln>
+        </p:spPr>
+        <p:style>
+          <a:lnRef idx="3">
+            <a:schemeClr val="accent5"/>
+          </a:lnRef>
+          <a:fillRef idx="0">
+            <a:schemeClr val="accent5"/>
+          </a:fillRef>
+          <a:effectRef idx="2">
+            <a:schemeClr val="accent5"/>
+          </a:effectRef>
+          <a:fontRef idx="minor">
+            <a:schemeClr val="tx1"/>
+          </a:fontRef>
+        </p:style>
+      </p:sp>
+      <p:sp>
+        <p:nvSpPr>
+          <p:cNvPr id="7" name="Shape 5"/>
+          <p:cNvSpPr/>
+          <p:nvPr/>
+        </p:nvSpPr>
+        <p:spPr>
+          <a:xfrm>
+            <a:off x="3076956" y="1005840"/>
+            <a:ext cx="320040" cy="0"/>
+          </a:xfrm>
+          <a:prstGeom prst="line">
+            <a:avLst/>
+          </a:prstGeom>
+          <a:ln>
+            <a:tailEnd type="triangle"/>
+          </a:ln>
+        </p:spPr>
+        <p:style>
+          <a:lnRef idx="3">
+            <a:schemeClr val="accent5"/>
+          </a:lnRef>
+          <a:fillRef idx="0">
+            <a:schemeClr val="accent5"/>
+          </a:fillRef>
+          <a:effectRef idx="2">
+            <a:schemeClr val="accent5"/>
+          </a:effectRef>
+          <a:fontRef idx="minor">
+            <a:schemeClr val="tx1"/>
+          </a:fontRef>
+        </p:style>
+      </p:sp>
+      <p:sp>
+        <p:nvSpPr>
+          <p:cNvPr id="8" name="Shape 6"/>
+          <p:cNvSpPr/>
+          <p:nvPr/>
+        </p:nvSpPr>
+        <p:spPr>
+          <a:xfrm>
+            <a:off x="3076956" y="3200400"/>
+            <a:ext cx="320040" cy="0"/>
+          </a:xfrm>
+          <a:prstGeom prst="line">
+            <a:avLst/>
+          </a:prstGeom>
+          <a:ln>
+            <a:tailEnd type="triangle"/>
+          </a:ln>
+        </p:spPr>
+        <p:style>
+          <a:lnRef idx="3">
+            <a:schemeClr val="accent5"/>
+          </a:lnRef>
+          <a:fillRef idx="0">
+            <a:schemeClr val="accent5"/>
+          </a:fillRef>
+          <a:effectRef idx="2">
+            <a:schemeClr val="accent5"/>
+          </a:effectRef>
+          <a:fontRef idx="minor">
+            <a:schemeClr val="tx1"/>
+          </a:fontRef>
+        </p:style>
+      </p:sp>
+      <p:sp>
+        <p:nvSpPr>
+          <p:cNvPr id="9" name="Shape 7"/>
+          <p:cNvSpPr/>
+          <p:nvPr/>
+        </p:nvSpPr>
+        <p:spPr>
+          <a:xfrm>
+            <a:off x="5500116" y="1005840"/>
+            <a:ext cx="320040" cy="0"/>
+          </a:xfrm>
+          <a:prstGeom prst="line">
+            <a:avLst/>
+          </a:prstGeom>
+          <a:ln>
+            <a:tailEnd type="none"/>
+          </a:ln>
+        </p:spPr>
+        <p:style>
+          <a:lnRef idx="3">
+            <a:schemeClr val="accent5"/>
+          </a:lnRef>
+          <a:fillRef idx="0">
+            <a:schemeClr val="accent5"/>
+          </a:fillRef>
+          <a:effectRef idx="2">
+            <a:schemeClr val="accent5"/>
+          </a:effectRef>
+          <a:fontRef idx="minor">
+            <a:schemeClr val="tx1"/>
+          </a:fontRef>
+        </p:style>
+      </p:sp>
+      <p:sp>
+        <p:nvSpPr>
+          <p:cNvPr id="10" name="Shape 8"/>
+          <p:cNvSpPr/>
+          <p:nvPr/>
+        </p:nvSpPr>
+        <p:spPr>
+          <a:xfrm>
+            <a:off x="5500116" y="3200400"/>
+            <a:ext cx="320040" cy="0"/>
+          </a:xfrm>
+          <a:prstGeom prst="line">
+            <a:avLst/>
+          </a:prstGeom>
+          <a:ln>
+            <a:tailEnd type="none"/>
+          </a:ln>
+        </p:spPr>
+        <p:style>
+          <a:lnRef idx="3">
+            <a:schemeClr val="accent5"/>
+          </a:lnRef>
+          <a:fillRef idx="0">
+            <a:schemeClr val="accent5"/>
+          </a:fillRef>
+          <a:effectRef idx="2">
+            <a:schemeClr val="accent5"/>
+          </a:effectRef>
+          <a:fontRef idx="minor">
+            <a:schemeClr val="tx1"/>
+          </a:fontRef>
+        </p:style>
+      </p:sp>
+      <p:sp>
+        <p:nvSpPr>
+          <p:cNvPr id="11" name="Shape 9"/>
+          <p:cNvSpPr/>
+          <p:nvPr/>
+        </p:nvSpPr>
+        <p:spPr>
+          <a:xfrm>
+            <a:off x="5820156" y="1005840"/>
+            <a:ext cx="0" cy="2194560"/>
+          </a:xfrm>
+          <a:prstGeom prst="line">
+            <a:avLst/>
+          </a:prstGeom>
+          <a:ln>
+            <a:tailEnd type="none"/>
+          </a:ln>
+        </p:spPr>
+        <p:style>
+          <a:lnRef idx="3">
+            <a:schemeClr val="accent5"/>
+          </a:lnRef>
+          <a:fillRef idx="0">
+            <a:schemeClr val="accent5"/>
+          </a:fillRef>
+          <a:effectRef idx="2">
+            <a:schemeClr val="accent5"/>
+          </a:effectRef>
+          <a:fontRef idx="minor">
+            <a:schemeClr val="tx1"/>
+          </a:fontRef>
+        </p:style>
+      </p:sp>
+      <p:sp>
+        <p:nvSpPr>
+          <p:cNvPr id="12" name="Shape 10"/>
+          <p:cNvSpPr/>
+          <p:nvPr/>
+        </p:nvSpPr>
+        <p:spPr>
+          <a:xfrm>
+            <a:off x="5820156" y="2103120"/>
+            <a:ext cx="320040" cy="0"/>
+          </a:xfrm>
+          <a:prstGeom prst="line">
+            <a:avLst/>
+          </a:prstGeom>
+          <a:ln>
+            <a:tailEnd type="triangle"/>
+          </a:ln>
+        </p:spPr>
+        <p:style>
+          <a:lnRef idx="3">
+            <a:schemeClr val="accent5"/>
+          </a:lnRef>
+          <a:fillRef idx="0">
+            <a:schemeClr val="accent5"/>
+          </a:fillRef>
+          <a:effectRef idx="2">
+            <a:schemeClr val="accent5"/>
+          </a:effectRef>
+          <a:fontRef idx="minor">
+            <a:schemeClr val="tx1"/>
+          </a:fontRef>
+        </p:style>
+      </p:sp>
+      <p:sp>
+        <p:nvSpPr>
+          <p:cNvPr id="13" name="Shape 11"/>
+          <p:cNvSpPr/>
+          <p:nvPr/>
+        </p:nvSpPr>
+        <p:spPr>
+          <a:xfrm>
+            <a:off x="8426196" y="2103120"/>
+            <a:ext cx="640080" cy="0"/>
+          </a:xfrm>
+          <a:prstGeom prst="line">
+            <a:avLst/>
+          </a:prstGeom>
+          <a:ln>
+            <a:tailEnd type="triangle"/>
+          </a:ln>
+        </p:spPr>
+        <p:style>
+          <a:lnRef idx="3">
+            <a:schemeClr val="accent5"/>
+          </a:lnRef>
+          <a:fillRef idx="0">
+            <a:schemeClr val="accent5"/>
+          </a:fillRef>
+          <a:effectRef idx="2">
+            <a:schemeClr val="accent5"/>
+          </a:effectRef>
+          <a:fontRef idx="minor">
+            <a:schemeClr val="tx1"/>
+          </a:fontRef>
+        </p:style>
+      </p:sp>
+      <p:sp>
+        <p:nvSpPr>
+          <p:cNvPr id="14" name="Shape 12"/>
+          <p:cNvSpPr/>
+          <p:nvPr/>
+        </p:nvSpPr>
+        <p:spPr>
+          <a:xfrm>
+            <a:off x="653796" y="1280160"/>
+            <a:ext cx="2103120" cy="1645920"/>
+          </a:xfrm>
+          <a:prstGeom prst="roundRect">
+            <a:avLst>
+              <a:gd name="adj" fmla="val 5000"/>
+            </a:avLst>
+          </a:prstGeom>
+          <a:solidFill>
+            <a:srgbClr val="F3F6F8"/>
+          </a:solidFill>
+          <a:ln/>
+          <a:effectLst>
+            <a:outerShdw blurRad="88900" dist="25400" dir="5400000" algn="bl" rotWithShape="0">
+              <a:srgbClr val="1A2A44">
+                <a:alpha val="18000"/>
+              </a:srgbClr>
+            </a:outerShdw>
+          </a:effectLst>
+        </p:spPr>
+      </p:sp>
+      <p:sp>
+        <p:nvSpPr>
+          <p:cNvPr id="15" name="Shape 13"/>
+          <p:cNvSpPr/>
+          <p:nvPr/>
+        </p:nvSpPr>
+        <p:spPr>
+          <a:xfrm>
+            <a:off x="1513332" y="1426464"/>
+            <a:ext cx="384048" cy="384048"/>
+          </a:xfrm>
+          <a:prstGeom prst="ellipse">
+            <a:avLst/>
+          </a:prstGeom>
+          <a:solidFill>
+            <a:srgbClr val="0E7C86"/>
+          </a:solidFill>
+          <a:ln/>
+        </p:spPr>
+      </p:sp>
+      <p:sp>
+        <p:nvSpPr>
+          <p:cNvPr id="16" name="Text 14"/>
+          <p:cNvSpPr/>
+          <p:nvPr/>
+        </p:nvSpPr>
+        <p:spPr>
+          <a:xfrm>
+            <a:off x="1513332" y="1426464"/>
+            <a:ext cx="384048" cy="384048"/>
+          </a:xfrm>
+          <a:prstGeom prst="rect">
+            <a:avLst/>
+          </a:prstGeom>
+          <a:noFill/>
+          <a:ln/>
+        </p:spPr>
+        <p:txBody>
+          <a:bodyPr wrap="square" lIns="0" tIns="0" rIns="0" bIns="0" rtlCol="0" anchor="ctr"/>
+          <a:lstStyle/>
+          <a:p>
+            <a:pPr marL="0" indent="0" algn="ctr">
+              <a:buNone/>
+            </a:pPr>
+            <a:r>
+              <a:rPr lang="en-US" sz="1400" b="1" dirty="0">
+                <a:solidFill>
+                  <a:srgbClr val="FFFFFF"/>
+                </a:solidFill>
+                <a:latin typeface="Calibri" pitchFamily="34" charset="0"/>
+                <a:ea typeface="Calibri" pitchFamily="34" charset="-122"/>
+                <a:cs typeface="Calibri" pitchFamily="34" charset="-120"/>
+              </a:rPr>
+              <a:t>C</a:t>
+            </a:r>
+            <a:endParaRPr lang="en-US" sz="1400" dirty="0"/>
+          </a:p>
+        </p:txBody>
+      </p:sp>
+      <p:sp>
+        <p:nvSpPr>
+          <p:cNvPr id="17" name="Text 15"/>
+          <p:cNvSpPr/>
+          <p:nvPr/>
+        </p:nvSpPr>
+        <p:spPr>
+          <a:xfrm>
+            <a:off x="745236" y="1883664"/>
+            <a:ext cx="1920240" cy="365760"/>
+          </a:xfrm>
+          <a:prstGeom prst="rect">
+            <a:avLst/>
+          </a:prstGeom>
+          <a:noFill/>
+          <a:ln/>
+        </p:spPr>
+        <p:txBody>
+          <a:bodyPr wrap="square" lIns="0" tIns="0" rIns="0" bIns="0" rtlCol="0" anchor="t"/>
+          <a:lstStyle/>
+          <a:p>
+            <a:pPr marL="0" indent="0" algn="ctr">
+              <a:buNone/>
+            </a:pPr>
+            <a:r>
+              <a:rPr lang="en-US" sz="1350" b="1" dirty="0">
+                <a:solidFill>
+                  <a:srgbClr val="12203D"/>
+                </a:solidFill>
+                <a:latin typeface="Calibri" pitchFamily="34" charset="0"/>
+                <a:ea typeface="Calibri" pitchFamily="34" charset="-122"/>
+                <a:cs typeface="Calibri" pitchFamily="34" charset="-120"/>
+              </a:rPr>
+              <a:t>Customer</a:t>
+            </a:r>
+            <a:endParaRPr lang="en-US" sz="1350" dirty="0"/>
+          </a:p>
+        </p:txBody>
+      </p:sp>
+      <p:sp>
+        <p:nvSpPr>
+          <p:cNvPr id="18" name="Text 16"/>
+          <p:cNvSpPr/>
+          <p:nvPr/>
+        </p:nvSpPr>
+        <p:spPr>
+          <a:xfrm>
+            <a:off x="800100" y="2249424"/>
+            <a:ext cx="1810512" cy="566928"/>
+          </a:xfrm>
+          <a:prstGeom prst="rect">
+            <a:avLst/>
+          </a:prstGeom>
+          <a:noFill/>
+          <a:ln/>
+        </p:spPr>
+        <p:txBody>
+          <a:bodyPr wrap="square" lIns="0" tIns="0" rIns="0" bIns="0" rtlCol="0" anchor="t"/>
+          <a:lstStyle/>
+          <a:p>
+            <a:pPr marL="0" indent="0" algn="ctr">
+              <a:lnSpc>
+                <a:spcPct val="112000"/>
+              </a:lnSpc>
+              <a:buNone/>
+            </a:pPr>
+            <a:r>
+              <a:rPr lang="en-US" sz="1000" dirty="0">
+                <a:solidFill>
+                  <a:srgbClr val="5B6B82"/>
+                </a:solidFill>
+                <a:latin typeface="Calibri" pitchFamily="34" charset="0"/>
+                <a:ea typeface="Calibri" pitchFamily="34" charset="-122"/>
+                <a:cs typeface="Calibri" pitchFamily="34" charset="-120"/>
+              </a:rPr>
+              <a:t>Subscribes to DavinTrade with a referral code at checkout</a:t>
+            </a:r>
+            <a:endParaRPr lang="en-US" sz="1000" dirty="0"/>
+          </a:p>
+        </p:txBody>
+      </p:sp>
+      <p:sp>
+        <p:nvSpPr>
+          <p:cNvPr id="19" name="Shape 17"/>
+          <p:cNvSpPr/>
+          <p:nvPr/>
+        </p:nvSpPr>
+        <p:spPr>
+          <a:xfrm>
+            <a:off x="3396996" y="274320"/>
+            <a:ext cx="2103120" cy="1463040"/>
+          </a:xfrm>
+          <a:prstGeom prst="roundRect">
+            <a:avLst>
+              <a:gd name="adj" fmla="val 5625"/>
+            </a:avLst>
+          </a:prstGeom>
+          <a:solidFill>
+            <a:srgbClr val="F3F6F8"/>
+          </a:solidFill>
+          <a:ln/>
+          <a:effectLst>
+            <a:outerShdw blurRad="88900" dist="25400" dir="5400000" algn="bl" rotWithShape="0">
+              <a:srgbClr val="1A2A44">
+                <a:alpha val="18000"/>
+              </a:srgbClr>
+            </a:outerShdw>
+          </a:effectLst>
+        </p:spPr>
+      </p:sp>
+      <p:sp>
+        <p:nvSpPr>
+          <p:cNvPr id="20" name="Shape 18"/>
+          <p:cNvSpPr/>
+          <p:nvPr/>
+        </p:nvSpPr>
+        <p:spPr>
+          <a:xfrm>
+            <a:off x="4267171" y="651987"/>
+            <a:ext cx="384048" cy="384048"/>
+          </a:xfrm>
+          <a:prstGeom prst="ellipse">
+            <a:avLst/>
+          </a:prstGeom>
+          <a:solidFill>
+            <a:srgbClr val="0E7C86"/>
+          </a:solidFill>
+          <a:ln/>
+        </p:spPr>
+      </p:sp>
+      <p:sp>
+        <p:nvSpPr>
+          <p:cNvPr id="21" name="Text 19"/>
+          <p:cNvSpPr/>
+          <p:nvPr/>
+        </p:nvSpPr>
+        <p:spPr>
+          <a:xfrm>
+            <a:off x="4271567" y="645481"/>
+            <a:ext cx="384048" cy="384048"/>
+          </a:xfrm>
+          <a:prstGeom prst="rect">
+            <a:avLst/>
+          </a:prstGeom>
+          <a:noFill/>
+          <a:ln/>
+        </p:spPr>
+        <p:txBody>
+          <a:bodyPr wrap="square" lIns="0" tIns="0" rIns="0" bIns="0" rtlCol="0" anchor="ctr"/>
+          <a:lstStyle/>
+          <a:p>
+            <a:pPr marL="0" indent="0" algn="ctr">
+              <a:buNone/>
+            </a:pPr>
+            <a:r>
+              <a:rPr lang="en-US" sz="1400" b="1" dirty="0">
+                <a:solidFill>
+                  <a:srgbClr val="FFFFFF"/>
+                </a:solidFill>
+                <a:latin typeface="Calibri" pitchFamily="34" charset="0"/>
+                <a:ea typeface="Calibri" pitchFamily="34" charset="-122"/>
+                <a:cs typeface="Calibri" pitchFamily="34" charset="-120"/>
+              </a:rPr>
+              <a:t>S</a:t>
+            </a:r>
+            <a:endParaRPr lang="en-US" sz="1400" dirty="0"/>
+          </a:p>
+        </p:txBody>
+      </p:sp>
+      <p:sp>
+        <p:nvSpPr>
+          <p:cNvPr id="22" name="Text 20"/>
+          <p:cNvSpPr/>
+          <p:nvPr/>
+        </p:nvSpPr>
+        <p:spPr>
+          <a:xfrm>
+            <a:off x="3488436" y="1024017"/>
+            <a:ext cx="1920240" cy="365760"/>
+          </a:xfrm>
+          <a:prstGeom prst="rect">
+            <a:avLst/>
+          </a:prstGeom>
+          <a:noFill/>
+          <a:ln/>
+        </p:spPr>
+        <p:txBody>
+          <a:bodyPr wrap="square" lIns="0" tIns="0" rIns="0" bIns="0" rtlCol="0" anchor="t"/>
+          <a:lstStyle/>
+          <a:p>
+            <a:pPr marL="0" indent="0" algn="ctr">
+              <a:buNone/>
+            </a:pPr>
+            <a:r>
+              <a:rPr lang="en-US" sz="1350" b="1" dirty="0">
+                <a:solidFill>
+                  <a:srgbClr val="12203D"/>
+                </a:solidFill>
+                <a:latin typeface="Calibri" pitchFamily="34" charset="0"/>
+                <a:ea typeface="Calibri" pitchFamily="34" charset="-122"/>
+                <a:cs typeface="Calibri" pitchFamily="34" charset="-120"/>
+              </a:rPr>
+              <a:t>Stripe</a:t>
+            </a:r>
+            <a:endParaRPr lang="en-US" sz="1350" dirty="0"/>
+          </a:p>
+        </p:txBody>
+      </p:sp>
+      <p:sp>
+        <p:nvSpPr>
+          <p:cNvPr id="23" name="Text 21"/>
+          <p:cNvSpPr/>
+          <p:nvPr/>
+        </p:nvSpPr>
+        <p:spPr>
+          <a:xfrm>
+            <a:off x="3543300" y="1243584"/>
+            <a:ext cx="1810512" cy="384048"/>
+          </a:xfrm>
+          <a:prstGeom prst="rect">
+            <a:avLst/>
+          </a:prstGeom>
+          <a:noFill/>
+          <a:ln/>
+        </p:spPr>
+        <p:txBody>
+          <a:bodyPr wrap="square" lIns="0" tIns="0" rIns="0" bIns="0" rtlCol="0" anchor="t"/>
+          <a:lstStyle/>
+          <a:p>
+            <a:pPr marL="0" indent="0" algn="ctr">
+              <a:lnSpc>
+                <a:spcPct val="112000"/>
+              </a:lnSpc>
+              <a:buNone/>
+            </a:pPr>
+            <a:r>
+              <a:rPr lang="en-US" sz="1000" dirty="0">
+                <a:solidFill>
+                  <a:srgbClr val="5B6B82"/>
+                </a:solidFill>
+                <a:latin typeface="Calibri" pitchFamily="34" charset="0"/>
+                <a:ea typeface="Calibri" pitchFamily="34" charset="-122"/>
+                <a:cs typeface="Calibri" pitchFamily="34" charset="-120"/>
+              </a:rPr>
+              <a:t>Global card payments &amp; subscriptions</a:t>
+            </a:r>
+            <a:endParaRPr lang="en-US" sz="1000" dirty="0"/>
+          </a:p>
+        </p:txBody>
+      </p:sp>
+      <p:sp>
+        <p:nvSpPr>
+          <p:cNvPr id="24" name="Shape 22"/>
+          <p:cNvSpPr/>
+          <p:nvPr/>
+        </p:nvSpPr>
+        <p:spPr>
+          <a:xfrm>
+            <a:off x="3383456" y="2468879"/>
+            <a:ext cx="2103120" cy="1463040"/>
+          </a:xfrm>
+          <a:prstGeom prst="roundRect">
+            <a:avLst>
+              <a:gd name="adj" fmla="val 5625"/>
+            </a:avLst>
+          </a:prstGeom>
+          <a:solidFill>
+            <a:srgbClr val="F3F6F8"/>
+          </a:solidFill>
+          <a:ln/>
+          <a:effectLst>
+            <a:outerShdw blurRad="88900" dist="25400" dir="5400000" algn="bl" rotWithShape="0">
+              <a:srgbClr val="1A2A44">
+                <a:alpha val="18000"/>
+              </a:srgbClr>
+            </a:outerShdw>
+          </a:effectLst>
+        </p:spPr>
+      </p:sp>
+      <p:sp>
+        <p:nvSpPr>
+          <p:cNvPr id="25" name="Shape 23"/>
+          <p:cNvSpPr/>
+          <p:nvPr/>
+        </p:nvSpPr>
+        <p:spPr>
+          <a:xfrm>
+            <a:off x="4232969" y="2884229"/>
+            <a:ext cx="384048" cy="384048"/>
+          </a:xfrm>
+          <a:prstGeom prst="ellipse">
+            <a:avLst/>
+          </a:prstGeom>
+          <a:solidFill>
+            <a:srgbClr val="0E7C86"/>
+          </a:solidFill>
+          <a:ln/>
+        </p:spPr>
+      </p:sp>
+      <p:sp>
+        <p:nvSpPr>
+          <p:cNvPr id="26" name="Text 24"/>
+          <p:cNvSpPr/>
+          <p:nvPr/>
+        </p:nvSpPr>
+        <p:spPr>
+          <a:xfrm>
+            <a:off x="4239739" y="2877723"/>
+            <a:ext cx="384048" cy="384048"/>
+          </a:xfrm>
+          <a:prstGeom prst="rect">
+            <a:avLst/>
+          </a:prstGeom>
+          <a:noFill/>
+          <a:ln/>
+        </p:spPr>
+        <p:txBody>
+          <a:bodyPr wrap="square" lIns="0" tIns="0" rIns="0" bIns="0" rtlCol="0" anchor="ctr"/>
+          <a:lstStyle/>
+          <a:p>
+            <a:pPr marL="0" indent="0" algn="ctr">
+              <a:buNone/>
+            </a:pPr>
+            <a:r>
+              <a:rPr lang="en-US" sz="1400" b="1" dirty="0">
+                <a:solidFill>
+                  <a:srgbClr val="FFFFFF"/>
+                </a:solidFill>
+                <a:latin typeface="Calibri" pitchFamily="34" charset="0"/>
+                <a:ea typeface="Calibri" pitchFamily="34" charset="-122"/>
+                <a:cs typeface="Calibri" pitchFamily="34" charset="-120"/>
+              </a:rPr>
+              <a:t>D</a:t>
+            </a:r>
+            <a:endParaRPr lang="en-US" sz="1400" dirty="0"/>
+          </a:p>
+        </p:txBody>
+      </p:sp>
+      <p:sp>
+        <p:nvSpPr>
+          <p:cNvPr id="27" name="Text 25"/>
+          <p:cNvSpPr/>
+          <p:nvPr/>
+        </p:nvSpPr>
+        <p:spPr>
+          <a:xfrm>
+            <a:off x="3474896" y="3236976"/>
+            <a:ext cx="1920240" cy="365760"/>
+          </a:xfrm>
+          <a:prstGeom prst="rect">
+            <a:avLst/>
+          </a:prstGeom>
+          <a:noFill/>
+          <a:ln/>
+        </p:spPr>
+        <p:txBody>
+          <a:bodyPr wrap="square" lIns="0" tIns="0" rIns="0" bIns="0" rtlCol="0" anchor="t"/>
+          <a:lstStyle/>
+          <a:p>
+            <a:pPr marL="0" indent="0" algn="ctr">
+              <a:buNone/>
+            </a:pPr>
+            <a:r>
+              <a:rPr lang="en-US" sz="1350" b="1" dirty="0">
+                <a:solidFill>
+                  <a:srgbClr val="12203D"/>
+                </a:solidFill>
+                <a:latin typeface="Calibri" pitchFamily="34" charset="0"/>
+                <a:ea typeface="Calibri" pitchFamily="34" charset="-122"/>
+                <a:cs typeface="Calibri" pitchFamily="34" charset="-120"/>
+              </a:rPr>
+              <a:t>dLocal</a:t>
+            </a:r>
+            <a:endParaRPr lang="en-US" sz="1350" dirty="0"/>
+          </a:p>
+        </p:txBody>
+      </p:sp>
+      <p:sp>
+        <p:nvSpPr>
+          <p:cNvPr id="28" name="Text 26"/>
+          <p:cNvSpPr/>
+          <p:nvPr/>
+        </p:nvSpPr>
+        <p:spPr>
+          <a:xfrm>
+            <a:off x="3543300" y="3438144"/>
+            <a:ext cx="1810512" cy="384048"/>
+          </a:xfrm>
+          <a:prstGeom prst="rect">
+            <a:avLst/>
+          </a:prstGeom>
+          <a:noFill/>
+          <a:ln/>
+        </p:spPr>
+        <p:txBody>
+          <a:bodyPr wrap="square" lIns="0" tIns="0" rIns="0" bIns="0" rtlCol="0" anchor="t"/>
+          <a:lstStyle/>
+          <a:p>
+            <a:pPr marL="0" indent="0" algn="ctr">
+              <a:lnSpc>
+                <a:spcPct val="112000"/>
+              </a:lnSpc>
+              <a:buNone/>
+            </a:pPr>
+            <a:r>
+              <a:rPr lang="en-US" sz="1000" dirty="0">
+                <a:solidFill>
+                  <a:srgbClr val="5B6B82"/>
+                </a:solidFill>
+                <a:latin typeface="Calibri" pitchFamily="34" charset="0"/>
+                <a:ea typeface="Calibri" pitchFamily="34" charset="-122"/>
+                <a:cs typeface="Calibri" pitchFamily="34" charset="-120"/>
+              </a:rPr>
+              <a:t>Local payment methods across 8 emerging markets</a:t>
+            </a:r>
+            <a:endParaRPr lang="en-US" sz="1000" dirty="0"/>
+          </a:p>
+        </p:txBody>
+      </p:sp>
+      <p:sp>
+        <p:nvSpPr>
+          <p:cNvPr id="29" name="Shape 27"/>
+          <p:cNvSpPr/>
+          <p:nvPr/>
+        </p:nvSpPr>
+        <p:spPr>
+          <a:xfrm>
+            <a:off x="6140196" y="1280160"/>
+            <a:ext cx="2286000" cy="1645920"/>
+          </a:xfrm>
+          <a:prstGeom prst="roundRect">
+            <a:avLst>
+              <a:gd name="adj" fmla="val 5000"/>
+            </a:avLst>
+          </a:prstGeom>
+          <a:solidFill>
+            <a:srgbClr val="F3F6F8"/>
+          </a:solidFill>
+          <a:ln/>
+          <a:effectLst>
+            <a:outerShdw blurRad="88900" dist="25400" dir="5400000" algn="bl" rotWithShape="0">
+              <a:srgbClr val="1A2A44">
+                <a:alpha val="18000"/>
+              </a:srgbClr>
+            </a:outerShdw>
+          </a:effectLst>
+        </p:spPr>
+      </p:sp>
+      <p:sp>
+        <p:nvSpPr>
+          <p:cNvPr id="30" name="Shape 28"/>
+          <p:cNvSpPr/>
+          <p:nvPr/>
+        </p:nvSpPr>
+        <p:spPr>
+          <a:xfrm>
+            <a:off x="7091172" y="1426464"/>
+            <a:ext cx="384048" cy="384048"/>
+          </a:xfrm>
+          <a:prstGeom prst="ellipse">
+            <a:avLst/>
+          </a:prstGeom>
+          <a:solidFill>
+            <a:srgbClr val="0E7C86"/>
+          </a:solidFill>
+          <a:ln/>
+        </p:spPr>
+      </p:sp>
+      <p:sp>
+        <p:nvSpPr>
+          <p:cNvPr id="31" name="Text 29"/>
+          <p:cNvSpPr/>
+          <p:nvPr/>
+        </p:nvSpPr>
+        <p:spPr>
+          <a:xfrm>
+            <a:off x="7091172" y="1426464"/>
+            <a:ext cx="384048" cy="384048"/>
+          </a:xfrm>
+          <a:prstGeom prst="rect">
+            <a:avLst/>
+          </a:prstGeom>
+          <a:noFill/>
+          <a:ln/>
+        </p:spPr>
+        <p:txBody>
+          <a:bodyPr wrap="square" lIns="0" tIns="0" rIns="0" bIns="0" rtlCol="0" anchor="ctr"/>
+          <a:lstStyle/>
+          <a:p>
+            <a:pPr marL="0" indent="0" algn="ctr">
+              <a:buNone/>
+            </a:pPr>
+            <a:r>
+              <a:rPr lang="en-US" sz="1400" b="1" dirty="0">
+                <a:solidFill>
+                  <a:srgbClr val="FFFFFF"/>
+                </a:solidFill>
+                <a:latin typeface="Calibri" pitchFamily="34" charset="0"/>
+                <a:ea typeface="Calibri" pitchFamily="34" charset="-122"/>
+                <a:cs typeface="Calibri" pitchFamily="34" charset="-120"/>
+              </a:rPr>
+              <a:t>A</a:t>
+            </a:r>
+            <a:endParaRPr lang="en-US" sz="1400" dirty="0"/>
+          </a:p>
+        </p:txBody>
+      </p:sp>
+      <p:sp>
+        <p:nvSpPr>
+          <p:cNvPr id="32" name="Text 30"/>
+          <p:cNvSpPr/>
+          <p:nvPr/>
+        </p:nvSpPr>
+        <p:spPr>
+          <a:xfrm>
+            <a:off x="6231636" y="1883664"/>
+            <a:ext cx="2103120" cy="365760"/>
+          </a:xfrm>
+          <a:prstGeom prst="rect">
+            <a:avLst/>
+          </a:prstGeom>
+          <a:noFill/>
+          <a:ln/>
+        </p:spPr>
+        <p:txBody>
+          <a:bodyPr wrap="square" lIns="0" tIns="0" rIns="0" bIns="0" rtlCol="0" anchor="t"/>
+          <a:lstStyle/>
+          <a:p>
+            <a:pPr marL="0" indent="0" algn="ctr">
+              <a:buNone/>
+            </a:pPr>
+            <a:r>
+              <a:rPr lang="en-US" sz="1350" b="1" dirty="0">
+                <a:solidFill>
+                  <a:srgbClr val="12203D"/>
+                </a:solidFill>
+                <a:latin typeface="Calibri" pitchFamily="34" charset="0"/>
+                <a:ea typeface="Calibri" pitchFamily="34" charset="-122"/>
+                <a:cs typeface="Calibri" pitchFamily="34" charset="-120"/>
+              </a:rPr>
+              <a:t>Affiliate Program</a:t>
+            </a:r>
+            <a:endParaRPr lang="en-US" sz="1350" dirty="0"/>
+          </a:p>
+        </p:txBody>
+      </p:sp>
+      <p:sp>
+        <p:nvSpPr>
+          <p:cNvPr id="33" name="Text 31"/>
+          <p:cNvSpPr/>
+          <p:nvPr/>
+        </p:nvSpPr>
+        <p:spPr>
+          <a:xfrm>
+            <a:off x="6286500" y="2249424"/>
+            <a:ext cx="1993392" cy="566928"/>
+          </a:xfrm>
+          <a:prstGeom prst="rect">
+            <a:avLst/>
+          </a:prstGeom>
+          <a:noFill/>
+          <a:ln/>
+        </p:spPr>
+        <p:txBody>
+          <a:bodyPr wrap="square" lIns="0" tIns="0" rIns="0" bIns="0" rtlCol="0" anchor="t"/>
+          <a:lstStyle/>
+          <a:p>
+            <a:pPr marL="0" indent="0" algn="ctr">
+              <a:lnSpc>
+                <a:spcPct val="112000"/>
+              </a:lnSpc>
+              <a:buNone/>
+            </a:pPr>
+            <a:r>
+              <a:rPr lang="en-US" sz="1000" dirty="0">
+                <a:solidFill>
+                  <a:srgbClr val="5B6B82"/>
+                </a:solidFill>
+                <a:latin typeface="Calibri" pitchFamily="34" charset="0"/>
+                <a:ea typeface="Calibri" pitchFamily="34" charset="-122"/>
+                <a:cs typeface="Calibri" pitchFamily="34" charset="-120"/>
+              </a:rPr>
+              <a:t>Referral attributed; commission earned &amp; tracked</a:t>
+            </a:r>
+            <a:endParaRPr lang="en-US" sz="1000" dirty="0"/>
+          </a:p>
+        </p:txBody>
+      </p:sp>
+      <p:sp>
+        <p:nvSpPr>
+          <p:cNvPr id="34" name="Shape 32"/>
+          <p:cNvSpPr/>
+          <p:nvPr/>
+        </p:nvSpPr>
+        <p:spPr>
+          <a:xfrm>
+            <a:off x="9066276" y="1280160"/>
+            <a:ext cx="2286000" cy="1645920"/>
+          </a:xfrm>
+          <a:prstGeom prst="roundRect">
+            <a:avLst>
+              <a:gd name="adj" fmla="val 5000"/>
+            </a:avLst>
+          </a:prstGeom>
+          <a:solidFill>
+            <a:srgbClr val="92D050"/>
+          </a:solidFill>
+          <a:ln/>
+          <a:effectLst>
+            <a:outerShdw blurRad="88900" dist="25400" dir="5400000" algn="bl" rotWithShape="0">
+              <a:srgbClr val="1A2A44">
+                <a:alpha val="18000"/>
+              </a:srgbClr>
+            </a:outerShdw>
+          </a:effectLst>
+        </p:spPr>
+      </p:sp>
+      <p:sp>
+        <p:nvSpPr>
+          <p:cNvPr id="35" name="Shape 33"/>
+          <p:cNvSpPr/>
+          <p:nvPr/>
+        </p:nvSpPr>
+        <p:spPr>
+          <a:xfrm>
+            <a:off x="10017252" y="1426464"/>
+            <a:ext cx="384048" cy="384048"/>
+          </a:xfrm>
+          <a:prstGeom prst="ellipse">
+            <a:avLst/>
+          </a:prstGeom>
+          <a:solidFill>
+            <a:srgbClr val="E8A33D"/>
+          </a:solidFill>
+          <a:ln/>
+        </p:spPr>
+      </p:sp>
+      <p:sp>
+        <p:nvSpPr>
+          <p:cNvPr id="36" name="Text 34"/>
+          <p:cNvSpPr/>
+          <p:nvPr/>
+        </p:nvSpPr>
+        <p:spPr>
+          <a:xfrm>
+            <a:off x="10017252" y="1426464"/>
+            <a:ext cx="384048" cy="384048"/>
+          </a:xfrm>
+          <a:prstGeom prst="rect">
+            <a:avLst/>
+          </a:prstGeom>
+          <a:noFill/>
+          <a:ln/>
+        </p:spPr>
+        <p:txBody>
+          <a:bodyPr wrap="square" lIns="0" tIns="0" rIns="0" bIns="0" rtlCol="0" anchor="ctr"/>
+          <a:lstStyle/>
+          <a:p>
+            <a:pPr marL="0" indent="0" algn="ctr">
+              <a:buNone/>
+            </a:pPr>
+            <a:r>
+              <a:rPr lang="en-US" sz="1400" b="1" dirty="0">
+                <a:solidFill>
+                  <a:srgbClr val="0A1226"/>
+                </a:solidFill>
+                <a:latin typeface="Calibri" pitchFamily="34" charset="0"/>
+                <a:cs typeface="Calibri" pitchFamily="34" charset="-120"/>
+              </a:rPr>
+              <a:t>W</a:t>
+            </a:r>
+            <a:endParaRPr lang="en-US" sz="1400" dirty="0"/>
+          </a:p>
+        </p:txBody>
+      </p:sp>
+      <p:sp>
+        <p:nvSpPr>
+          <p:cNvPr id="37" name="Text 35"/>
+          <p:cNvSpPr/>
+          <p:nvPr/>
+        </p:nvSpPr>
+        <p:spPr>
+          <a:xfrm>
+            <a:off x="9157716" y="1883664"/>
+            <a:ext cx="2103120" cy="365760"/>
+          </a:xfrm>
+          <a:prstGeom prst="rect">
+            <a:avLst/>
+          </a:prstGeom>
+          <a:noFill/>
+          <a:ln/>
+        </p:spPr>
+        <p:txBody>
+          <a:bodyPr wrap="square" lIns="0" tIns="0" rIns="0" bIns="0" rtlCol="0" anchor="t"/>
+          <a:lstStyle/>
+          <a:p>
+            <a:pPr marL="0" indent="0" algn="ctr">
+              <a:buNone/>
+            </a:pPr>
+            <a:r>
+              <a:rPr lang="en-US" sz="1350" b="1" dirty="0">
+                <a:latin typeface="Calibri" pitchFamily="34" charset="0"/>
+                <a:ea typeface="Calibri" pitchFamily="34" charset="-122"/>
+                <a:cs typeface="Calibri" pitchFamily="34" charset="-120"/>
+              </a:rPr>
+              <a:t>Wise</a:t>
+            </a:r>
+            <a:endParaRPr lang="en-US" sz="1350" dirty="0"/>
+          </a:p>
+        </p:txBody>
+      </p:sp>
+      <p:sp>
+        <p:nvSpPr>
+          <p:cNvPr id="38" name="Text 36"/>
+          <p:cNvSpPr/>
+          <p:nvPr/>
+        </p:nvSpPr>
+        <p:spPr>
+          <a:xfrm>
+            <a:off x="9212580" y="2249424"/>
+            <a:ext cx="1993392" cy="566928"/>
+          </a:xfrm>
+          <a:prstGeom prst="rect">
+            <a:avLst/>
+          </a:prstGeom>
+          <a:noFill/>
+          <a:ln/>
+        </p:spPr>
+        <p:txBody>
+          <a:bodyPr wrap="square" lIns="0" tIns="0" rIns="0" bIns="0" rtlCol="0" anchor="t"/>
+          <a:lstStyle/>
+          <a:p>
+            <a:pPr marL="0" indent="0" algn="ctr">
+              <a:lnSpc>
+                <a:spcPct val="112000"/>
+              </a:lnSpc>
+              <a:buNone/>
+            </a:pPr>
+            <a:r>
+              <a:rPr lang="en-US" sz="1000" dirty="0">
+                <a:latin typeface="Calibri" pitchFamily="34" charset="0"/>
+                <a:ea typeface="Calibri" pitchFamily="34" charset="-122"/>
+                <a:cs typeface="Calibri" pitchFamily="34" charset="-120"/>
+              </a:rPr>
+              <a:t>Aggregates commissions and disburses globally — fiats in different currencies only</a:t>
+            </a:r>
+            <a:endParaRPr lang="en-US" sz="1000" dirty="0"/>
+          </a:p>
+        </p:txBody>
+      </p:sp>
+      <p:sp>
+        <p:nvSpPr>
+          <p:cNvPr id="41" name="Shape 27">
+            <a:extLst>
+              <a:ext uri="{FF2B5EF4-FFF2-40B4-BE49-F238E27FC236}">
+                <a16:creationId xmlns:a16="http://schemas.microsoft.com/office/drawing/2014/main" id="{E9B2D4BD-1E8C-4BE2-A913-F63648919E16}"/>
+              </a:ext>
+            </a:extLst>
+          </p:cNvPr>
+          <p:cNvSpPr/>
+          <p:nvPr/>
+        </p:nvSpPr>
+        <p:spPr>
+          <a:xfrm>
+            <a:off x="6096000" y="4754880"/>
+            <a:ext cx="2286000" cy="1645920"/>
+          </a:xfrm>
+          <a:prstGeom prst="roundRect">
+            <a:avLst>
+              <a:gd name="adj" fmla="val 5000"/>
+            </a:avLst>
+          </a:prstGeom>
+          <a:solidFill>
+            <a:srgbClr val="F3F6F8"/>
+          </a:solidFill>
+          <a:ln/>
+          <a:effectLst>
+            <a:outerShdw blurRad="88900" dist="25400" dir="5400000" algn="bl" rotWithShape="0">
+              <a:srgbClr val="1A2A44">
+                <a:alpha val="18000"/>
+              </a:srgbClr>
+            </a:outerShdw>
+          </a:effectLst>
+        </p:spPr>
+        <p:txBody>
+          <a:bodyPr/>
+          <a:lstStyle/>
+          <a:p>
+            <a:endParaRPr lang="en-TZ" dirty="0"/>
+          </a:p>
+        </p:txBody>
+      </p:sp>
+      <p:sp>
+        <p:nvSpPr>
+          <p:cNvPr id="42" name="Shape 28">
+            <a:extLst>
+              <a:ext uri="{FF2B5EF4-FFF2-40B4-BE49-F238E27FC236}">
+                <a16:creationId xmlns:a16="http://schemas.microsoft.com/office/drawing/2014/main" id="{D27AC50F-4980-44C4-889C-F62FDCEF7ABE}"/>
+              </a:ext>
+            </a:extLst>
+          </p:cNvPr>
+          <p:cNvSpPr/>
+          <p:nvPr/>
+        </p:nvSpPr>
+        <p:spPr>
+          <a:xfrm>
+            <a:off x="7046976" y="4972460"/>
+            <a:ext cx="384048" cy="384048"/>
+          </a:xfrm>
+          <a:prstGeom prst="ellipse">
+            <a:avLst/>
+          </a:prstGeom>
+          <a:solidFill>
+            <a:srgbClr val="0E7C86"/>
+          </a:solidFill>
+          <a:ln/>
+        </p:spPr>
+        <p:txBody>
+          <a:bodyPr/>
+          <a:lstStyle/>
+          <a:p>
+            <a:r>
+              <a:rPr lang="en-US" sz="1600" b="1" dirty="0">
+                <a:solidFill>
+                  <a:schemeClr val="bg1"/>
+                </a:solidFill>
+              </a:rPr>
+              <a:t>S</a:t>
+            </a:r>
+            <a:endParaRPr lang="en-TZ" sz="1600" b="1" dirty="0">
+              <a:solidFill>
+                <a:schemeClr val="bg1"/>
+              </a:solidFill>
+            </a:endParaRPr>
+          </a:p>
+        </p:txBody>
+      </p:sp>
+      <p:sp>
+        <p:nvSpPr>
+          <p:cNvPr id="43" name="Text 30">
+            <a:extLst>
+              <a:ext uri="{FF2B5EF4-FFF2-40B4-BE49-F238E27FC236}">
+                <a16:creationId xmlns:a16="http://schemas.microsoft.com/office/drawing/2014/main" id="{96F5C4C3-46F4-42FD-9A6D-064CFEA7D67B}"/>
+              </a:ext>
+            </a:extLst>
+          </p:cNvPr>
+          <p:cNvSpPr/>
+          <p:nvPr/>
+        </p:nvSpPr>
+        <p:spPr>
+          <a:xfrm>
+            <a:off x="6185330" y="5356508"/>
+            <a:ext cx="2103120" cy="842948"/>
+          </a:xfrm>
+          <a:prstGeom prst="rect">
+            <a:avLst/>
+          </a:prstGeom>
+          <a:noFill/>
+          <a:ln/>
+        </p:spPr>
+        <p:txBody>
+          <a:bodyPr wrap="square" lIns="0" tIns="0" rIns="0" bIns="0" rtlCol="0" anchor="t"/>
+          <a:lstStyle/>
+          <a:p>
+            <a:pPr marL="0" indent="0" algn="ctr">
+              <a:buNone/>
+            </a:pPr>
+            <a:r>
+              <a:rPr lang="en-US" sz="1350" b="1" dirty="0"/>
+              <a:t>Thai Bank Account</a:t>
+            </a:r>
+          </a:p>
+          <a:p>
+            <a:pPr marL="0" indent="0" algn="ctr">
+              <a:buNone/>
+            </a:pPr>
+            <a:r>
+              <a:rPr lang="en-US" sz="1350" b="1" dirty="0"/>
+              <a:t>In USD currency</a:t>
+            </a:r>
+          </a:p>
+        </p:txBody>
+      </p:sp>
+      <p:pic>
+        <p:nvPicPr>
+          <p:cNvPr id="45" name="Picture 44">
+            <a:extLst>
+              <a:ext uri="{FF2B5EF4-FFF2-40B4-BE49-F238E27FC236}">
+                <a16:creationId xmlns:a16="http://schemas.microsoft.com/office/drawing/2014/main" id="{0223B4E2-B73B-4A0F-BC32-1DA923EDE8A1}"/>
+              </a:ext>
+            </a:extLst>
+          </p:cNvPr>
+          <p:cNvPicPr>
+            <a:picLocks noChangeAspect="1"/>
+          </p:cNvPicPr>
+          <p:nvPr/>
+        </p:nvPicPr>
+        <p:blipFill>
+          <a:blip r:embed="rId3"/>
+          <a:stretch>
+            <a:fillRect/>
+          </a:stretch>
+        </p:blipFill>
+        <p:spPr>
+          <a:xfrm>
+            <a:off x="9311209" y="3221997"/>
+            <a:ext cx="594361" cy="594361"/>
+          </a:xfrm>
+          <a:prstGeom prst="rect">
+            <a:avLst/>
+          </a:prstGeom>
+        </p:spPr>
+      </p:pic>
+      <p:sp>
+        <p:nvSpPr>
+          <p:cNvPr id="46" name="TextBox 45">
+            <a:extLst>
+              <a:ext uri="{FF2B5EF4-FFF2-40B4-BE49-F238E27FC236}">
+                <a16:creationId xmlns:a16="http://schemas.microsoft.com/office/drawing/2014/main" id="{A741C254-D918-4451-86E9-16B100697F1C}"/>
+              </a:ext>
+            </a:extLst>
+          </p:cNvPr>
+          <p:cNvSpPr txBox="1"/>
+          <p:nvPr/>
+        </p:nvSpPr>
+        <p:spPr>
+          <a:xfrm>
+            <a:off x="9267093" y="3747254"/>
+            <a:ext cx="808892" cy="369332"/>
+          </a:xfrm>
+          <a:prstGeom prst="rect">
+            <a:avLst/>
+          </a:prstGeom>
+          <a:noFill/>
+        </p:spPr>
+        <p:txBody>
+          <a:bodyPr wrap="square" rtlCol="0">
+            <a:spAutoFit/>
+          </a:bodyPr>
+          <a:lstStyle/>
+          <a:p>
+            <a:r>
+              <a:rPr lang="en-US" dirty="0"/>
+              <a:t>Davin</a:t>
+            </a:r>
+            <a:endParaRPr lang="en-TZ" dirty="0"/>
+          </a:p>
+        </p:txBody>
+      </p:sp>
+      <p:sp>
+        <p:nvSpPr>
+          <p:cNvPr id="60" name="TextBox 59">
+            <a:extLst>
+              <a:ext uri="{FF2B5EF4-FFF2-40B4-BE49-F238E27FC236}">
+                <a16:creationId xmlns:a16="http://schemas.microsoft.com/office/drawing/2014/main" id="{1AD517F3-BEDC-41D3-91E6-A583445D264A}"/>
+              </a:ext>
+            </a:extLst>
+          </p:cNvPr>
+          <p:cNvSpPr txBox="1"/>
+          <p:nvPr/>
+        </p:nvSpPr>
+        <p:spPr>
+          <a:xfrm>
+            <a:off x="3564579" y="329007"/>
+            <a:ext cx="1789233" cy="261610"/>
+          </a:xfrm>
+          <a:prstGeom prst="rect">
+            <a:avLst/>
+          </a:prstGeom>
+          <a:noFill/>
+        </p:spPr>
+        <p:txBody>
+          <a:bodyPr wrap="square" rtlCol="0">
+            <a:spAutoFit/>
+          </a:bodyPr>
+          <a:lstStyle/>
+          <a:p>
+            <a:r>
+              <a:rPr lang="en-US" sz="1100" dirty="0"/>
+              <a:t>International Card Payment</a:t>
+            </a:r>
+            <a:endParaRPr lang="en-TZ" sz="1100" dirty="0"/>
+          </a:p>
+        </p:txBody>
+      </p:sp>
+      <p:sp>
+        <p:nvSpPr>
+          <p:cNvPr id="61" name="TextBox 60">
+            <a:extLst>
+              <a:ext uri="{FF2B5EF4-FFF2-40B4-BE49-F238E27FC236}">
+                <a16:creationId xmlns:a16="http://schemas.microsoft.com/office/drawing/2014/main" id="{BD919116-E670-4391-9A14-223F4E8A8A94}"/>
+              </a:ext>
+            </a:extLst>
+          </p:cNvPr>
+          <p:cNvSpPr txBox="1"/>
+          <p:nvPr/>
+        </p:nvSpPr>
+        <p:spPr>
+          <a:xfrm>
+            <a:off x="3387500" y="2482004"/>
+            <a:ext cx="2103121" cy="430887"/>
+          </a:xfrm>
+          <a:prstGeom prst="rect">
+            <a:avLst/>
+          </a:prstGeom>
+          <a:noFill/>
+        </p:spPr>
+        <p:txBody>
+          <a:bodyPr wrap="square" rtlCol="0">
+            <a:spAutoFit/>
+          </a:bodyPr>
+          <a:lstStyle/>
+          <a:p>
+            <a:pPr algn="ctr"/>
+            <a:r>
+              <a:rPr lang="en-US" sz="1100" dirty="0"/>
+              <a:t>Non-International Cards Payment (Emerging Markets)</a:t>
+            </a:r>
+            <a:endParaRPr lang="en-TZ" sz="1100" dirty="0"/>
+          </a:p>
+        </p:txBody>
+      </p:sp>
+      <p:cxnSp>
+        <p:nvCxnSpPr>
+          <p:cNvPr id="70" name="Straight Arrow Connector 69">
+            <a:extLst>
+              <a:ext uri="{FF2B5EF4-FFF2-40B4-BE49-F238E27FC236}">
+                <a16:creationId xmlns:a16="http://schemas.microsoft.com/office/drawing/2014/main" id="{831A4BB8-C5F7-4B79-88B4-C0471704986C}"/>
+              </a:ext>
+            </a:extLst>
+          </p:cNvPr>
+          <p:cNvCxnSpPr>
+            <a:cxnSpLocks/>
+          </p:cNvCxnSpPr>
+          <p:nvPr/>
+        </p:nvCxnSpPr>
+        <p:spPr>
+          <a:xfrm flipH="1">
+            <a:off x="7949532" y="2946566"/>
+            <a:ext cx="1109947" cy="1761715"/>
+          </a:xfrm>
+          <a:prstGeom prst="straightConnector1">
+            <a:avLst/>
+          </a:prstGeom>
+          <a:ln>
+            <a:tailEnd type="triangle"/>
+          </a:ln>
+        </p:spPr>
+        <p:style>
+          <a:lnRef idx="3">
+            <a:schemeClr val="accent2"/>
+          </a:lnRef>
+          <a:fillRef idx="0">
+            <a:schemeClr val="accent2"/>
+          </a:fillRef>
+          <a:effectRef idx="2">
+            <a:schemeClr val="accent2"/>
+          </a:effectRef>
+          <a:fontRef idx="minor">
+            <a:schemeClr val="tx1"/>
+          </a:fontRef>
+        </p:style>
+      </p:cxnSp>
+      <p:cxnSp>
+        <p:nvCxnSpPr>
+          <p:cNvPr id="51" name="Straight Arrow Connector 50">
+            <a:extLst>
+              <a:ext uri="{FF2B5EF4-FFF2-40B4-BE49-F238E27FC236}">
+                <a16:creationId xmlns:a16="http://schemas.microsoft.com/office/drawing/2014/main" id="{559F69BB-5B23-4A6D-ACC8-0F92C4202032}"/>
+              </a:ext>
+            </a:extLst>
+          </p:cNvPr>
+          <p:cNvCxnSpPr>
+            <a:cxnSpLocks/>
+          </p:cNvCxnSpPr>
+          <p:nvPr/>
+        </p:nvCxnSpPr>
+        <p:spPr>
+          <a:xfrm>
+            <a:off x="5547946" y="818148"/>
+            <a:ext cx="3486150" cy="809484"/>
+          </a:xfrm>
+          <a:prstGeom prst="straightConnector1">
+            <a:avLst/>
+          </a:prstGeom>
+          <a:ln>
+            <a:tailEnd type="triangle"/>
+          </a:ln>
+        </p:spPr>
+        <p:style>
+          <a:lnRef idx="3">
+            <a:schemeClr val="accent2"/>
+          </a:lnRef>
+          <a:fillRef idx="0">
+            <a:schemeClr val="accent2"/>
+          </a:fillRef>
+          <a:effectRef idx="2">
+            <a:schemeClr val="accent2"/>
+          </a:effectRef>
+          <a:fontRef idx="minor">
+            <a:schemeClr val="tx1"/>
+          </a:fontRef>
+        </p:style>
+      </p:cxnSp>
+      <p:cxnSp>
+        <p:nvCxnSpPr>
+          <p:cNvPr id="48" name="Straight Arrow Connector 47">
+            <a:extLst>
+              <a:ext uri="{FF2B5EF4-FFF2-40B4-BE49-F238E27FC236}">
+                <a16:creationId xmlns:a16="http://schemas.microsoft.com/office/drawing/2014/main" id="{6850B4C3-AF9B-44CD-9BDE-E08934479CD3}"/>
+              </a:ext>
+            </a:extLst>
+          </p:cNvPr>
+          <p:cNvCxnSpPr>
+            <a:cxnSpLocks/>
+          </p:cNvCxnSpPr>
+          <p:nvPr/>
+        </p:nvCxnSpPr>
+        <p:spPr>
+          <a:xfrm flipV="1">
+            <a:off x="5478859" y="2435538"/>
+            <a:ext cx="3587417" cy="1048479"/>
+          </a:xfrm>
+          <a:prstGeom prst="straightConnector1">
+            <a:avLst/>
+          </a:prstGeom>
+          <a:ln>
+            <a:tailEnd type="triangle"/>
+          </a:ln>
+        </p:spPr>
+        <p:style>
+          <a:lnRef idx="3">
+            <a:schemeClr val="accent2"/>
+          </a:lnRef>
+          <a:fillRef idx="0">
+            <a:schemeClr val="accent2"/>
+          </a:fillRef>
+          <a:effectRef idx="2">
+            <a:schemeClr val="accent2"/>
+          </a:effectRef>
+          <a:fontRef idx="minor">
+            <a:schemeClr val="tx1"/>
+          </a:fontRef>
+        </p:style>
+      </p:cxnSp>
+      <p:pic>
+        <p:nvPicPr>
+          <p:cNvPr id="79" name="Picture 78">
+            <a:extLst>
+              <a:ext uri="{FF2B5EF4-FFF2-40B4-BE49-F238E27FC236}">
+                <a16:creationId xmlns:a16="http://schemas.microsoft.com/office/drawing/2014/main" id="{C41C0742-509A-431D-AE12-71D0F844BBB2}"/>
+              </a:ext>
+            </a:extLst>
+          </p:cNvPr>
+          <p:cNvPicPr>
+            <a:picLocks noChangeAspect="1"/>
+          </p:cNvPicPr>
+          <p:nvPr/>
+        </p:nvPicPr>
+        <p:blipFill>
+          <a:blip r:embed="rId4"/>
+          <a:stretch>
+            <a:fillRect/>
+          </a:stretch>
+        </p:blipFill>
+        <p:spPr>
+          <a:xfrm>
+            <a:off x="9641983" y="4984470"/>
+            <a:ext cx="2265440" cy="1510293"/>
+          </a:xfrm>
+          <a:prstGeom prst="rect">
+            <a:avLst/>
+          </a:prstGeom>
+        </p:spPr>
+      </p:pic>
+      <p:sp>
+        <p:nvSpPr>
+          <p:cNvPr id="86" name="TextBox 85">
+            <a:extLst>
+              <a:ext uri="{FF2B5EF4-FFF2-40B4-BE49-F238E27FC236}">
+                <a16:creationId xmlns:a16="http://schemas.microsoft.com/office/drawing/2014/main" id="{C65200B7-7F0D-46C2-B5C9-3EB53FA8B1E3}"/>
+              </a:ext>
+            </a:extLst>
+          </p:cNvPr>
+          <p:cNvSpPr txBox="1"/>
+          <p:nvPr/>
+        </p:nvSpPr>
+        <p:spPr>
+          <a:xfrm>
+            <a:off x="10075985" y="6540929"/>
+            <a:ext cx="1877685" cy="276999"/>
+          </a:xfrm>
+          <a:prstGeom prst="rect">
+            <a:avLst/>
+          </a:prstGeom>
+          <a:noFill/>
+        </p:spPr>
+        <p:txBody>
+          <a:bodyPr wrap="square" rtlCol="0">
+            <a:spAutoFit/>
+          </a:bodyPr>
+          <a:lstStyle/>
+          <a:p>
+            <a:r>
+              <a:rPr lang="en-US" sz="1200" dirty="0"/>
+              <a:t>Bank’s Account of Affiliates</a:t>
+            </a:r>
+            <a:endParaRPr lang="en-TZ" sz="1200" dirty="0"/>
+          </a:p>
+        </p:txBody>
+      </p:sp>
+      <p:cxnSp>
+        <p:nvCxnSpPr>
+          <p:cNvPr id="89" name="Straight Arrow Connector 88">
+            <a:extLst>
+              <a:ext uri="{FF2B5EF4-FFF2-40B4-BE49-F238E27FC236}">
+                <a16:creationId xmlns:a16="http://schemas.microsoft.com/office/drawing/2014/main" id="{84C15850-58A0-4B72-9F68-299CB7AE896F}"/>
+              </a:ext>
+            </a:extLst>
+          </p:cNvPr>
+          <p:cNvCxnSpPr>
+            <a:cxnSpLocks/>
+          </p:cNvCxnSpPr>
+          <p:nvPr/>
+        </p:nvCxnSpPr>
+        <p:spPr>
+          <a:xfrm>
+            <a:off x="415525" y="6161102"/>
+            <a:ext cx="312127" cy="9555"/>
+          </a:xfrm>
+          <a:prstGeom prst="straightConnector1">
+            <a:avLst/>
+          </a:prstGeom>
+          <a:ln>
+            <a:tailEnd type="triangle"/>
+          </a:ln>
+        </p:spPr>
+        <p:style>
+          <a:lnRef idx="3">
+            <a:schemeClr val="accent5"/>
+          </a:lnRef>
+          <a:fillRef idx="0">
+            <a:schemeClr val="accent5"/>
+          </a:fillRef>
+          <a:effectRef idx="2">
+            <a:schemeClr val="accent5"/>
+          </a:effectRef>
+          <a:fontRef idx="minor">
+            <a:schemeClr val="tx1"/>
+          </a:fontRef>
+        </p:style>
+      </p:cxnSp>
+      <p:sp>
+        <p:nvSpPr>
+          <p:cNvPr id="92" name="TextBox 91">
+            <a:extLst>
+              <a:ext uri="{FF2B5EF4-FFF2-40B4-BE49-F238E27FC236}">
+                <a16:creationId xmlns:a16="http://schemas.microsoft.com/office/drawing/2014/main" id="{413335F5-2B13-46F8-8CB2-FC074AEA0302}"/>
+              </a:ext>
+            </a:extLst>
+          </p:cNvPr>
+          <p:cNvSpPr txBox="1"/>
+          <p:nvPr/>
+        </p:nvSpPr>
+        <p:spPr>
+          <a:xfrm>
+            <a:off x="745236" y="6039852"/>
+            <a:ext cx="1991105" cy="261610"/>
+          </a:xfrm>
+          <a:prstGeom prst="rect">
+            <a:avLst/>
+          </a:prstGeom>
+          <a:noFill/>
+        </p:spPr>
+        <p:txBody>
+          <a:bodyPr wrap="square" rtlCol="0">
+            <a:spAutoFit/>
+          </a:bodyPr>
+          <a:lstStyle/>
+          <a:p>
+            <a:r>
+              <a:rPr lang="en-US" sz="1100" dirty="0">
+                <a:solidFill>
+                  <a:schemeClr val="accent5">
+                    <a:lumMod val="75000"/>
+                  </a:schemeClr>
+                </a:solidFill>
+              </a:rPr>
+              <a:t>Blue arrow routes = dataflow</a:t>
+            </a:r>
+            <a:endParaRPr lang="en-TZ" sz="1100" dirty="0">
+              <a:solidFill>
+                <a:schemeClr val="accent5">
+                  <a:lumMod val="75000"/>
+                </a:schemeClr>
+              </a:solidFill>
+            </a:endParaRPr>
+          </a:p>
+        </p:txBody>
+      </p:sp>
+      <p:cxnSp>
+        <p:nvCxnSpPr>
+          <p:cNvPr id="93" name="Straight Arrow Connector 92">
+            <a:extLst>
+              <a:ext uri="{FF2B5EF4-FFF2-40B4-BE49-F238E27FC236}">
+                <a16:creationId xmlns:a16="http://schemas.microsoft.com/office/drawing/2014/main" id="{F196C329-3389-40AF-A3B4-8F6EFAD39798}"/>
+              </a:ext>
+            </a:extLst>
+          </p:cNvPr>
+          <p:cNvCxnSpPr>
+            <a:cxnSpLocks/>
+          </p:cNvCxnSpPr>
+          <p:nvPr/>
+        </p:nvCxnSpPr>
+        <p:spPr>
+          <a:xfrm>
+            <a:off x="401119" y="6419079"/>
+            <a:ext cx="312127" cy="9555"/>
+          </a:xfrm>
+          <a:prstGeom prst="straightConnector1">
+            <a:avLst/>
+          </a:prstGeom>
+          <a:ln>
+            <a:tailEnd type="triangle"/>
+          </a:ln>
+        </p:spPr>
+        <p:style>
+          <a:lnRef idx="3">
+            <a:schemeClr val="accent2"/>
+          </a:lnRef>
+          <a:fillRef idx="0">
+            <a:schemeClr val="accent2"/>
+          </a:fillRef>
+          <a:effectRef idx="2">
+            <a:schemeClr val="accent2"/>
+          </a:effectRef>
+          <a:fontRef idx="minor">
+            <a:schemeClr val="tx1"/>
+          </a:fontRef>
+        </p:style>
+      </p:cxnSp>
+      <p:sp>
+        <p:nvSpPr>
+          <p:cNvPr id="94" name="TextBox 93">
+            <a:extLst>
+              <a:ext uri="{FF2B5EF4-FFF2-40B4-BE49-F238E27FC236}">
+                <a16:creationId xmlns:a16="http://schemas.microsoft.com/office/drawing/2014/main" id="{D0B0A7AA-990E-474C-80F1-0158516C613E}"/>
+              </a:ext>
+            </a:extLst>
+          </p:cNvPr>
+          <p:cNvSpPr txBox="1"/>
+          <p:nvPr/>
+        </p:nvSpPr>
+        <p:spPr>
+          <a:xfrm>
+            <a:off x="730830" y="6297829"/>
+            <a:ext cx="2273678" cy="261610"/>
+          </a:xfrm>
+          <a:prstGeom prst="rect">
+            <a:avLst/>
+          </a:prstGeom>
+          <a:noFill/>
+        </p:spPr>
+        <p:txBody>
+          <a:bodyPr wrap="square" rtlCol="0">
+            <a:spAutoFit/>
+          </a:bodyPr>
+          <a:lstStyle/>
+          <a:p>
+            <a:r>
+              <a:rPr lang="en-US" sz="1100" dirty="0">
+                <a:solidFill>
+                  <a:schemeClr val="accent2"/>
+                </a:solidFill>
+              </a:rPr>
+              <a:t>Orange arrow routes = </a:t>
+            </a:r>
+            <a:r>
+              <a:rPr lang="en-US" sz="1100" dirty="0" err="1">
+                <a:solidFill>
+                  <a:schemeClr val="accent2"/>
+                </a:solidFill>
+              </a:rPr>
+              <a:t>moneyflow</a:t>
+            </a:r>
+            <a:endParaRPr lang="en-TZ" sz="1100" dirty="0">
+              <a:solidFill>
+                <a:schemeClr val="accent2"/>
+              </a:solidFill>
+            </a:endParaRPr>
+          </a:p>
+        </p:txBody>
+      </p:sp>
+      <p:sp>
+        <p:nvSpPr>
+          <p:cNvPr id="95" name="TextBox 94">
+            <a:extLst>
+              <a:ext uri="{FF2B5EF4-FFF2-40B4-BE49-F238E27FC236}">
+                <a16:creationId xmlns:a16="http://schemas.microsoft.com/office/drawing/2014/main" id="{C43AEEE2-23D5-40D1-B79B-84C24FB818D4}"/>
+              </a:ext>
+            </a:extLst>
+          </p:cNvPr>
+          <p:cNvSpPr txBox="1"/>
+          <p:nvPr/>
+        </p:nvSpPr>
+        <p:spPr>
+          <a:xfrm rot="748931">
+            <a:off x="6576953" y="841037"/>
+            <a:ext cx="1745272" cy="307777"/>
+          </a:xfrm>
+          <a:prstGeom prst="rect">
+            <a:avLst/>
+          </a:prstGeom>
+          <a:noFill/>
+        </p:spPr>
+        <p:txBody>
+          <a:bodyPr wrap="square" rtlCol="0">
+            <a:spAutoFit/>
+            <a:scene3d>
+              <a:camera prst="orthographicFront"/>
+              <a:lightRig rig="soft" dir="t">
+                <a:rot lat="0" lon="0" rev="15600000"/>
+              </a:lightRig>
+            </a:scene3d>
+            <a:sp3d extrusionH="57150" prstMaterial="softEdge">
+              <a:bevelT w="25400" h="38100"/>
+            </a:sp3d>
+          </a:bodyPr>
+          <a:lstStyle/>
+          <a:p>
+            <a:r>
+              <a:rPr lang="en-US" sz="700" b="1" dirty="0">
+                <a:ln/>
+                <a:solidFill>
+                  <a:schemeClr val="accent2">
+                    <a:lumMod val="50000"/>
+                  </a:schemeClr>
+                </a:solidFill>
+              </a:rPr>
+              <a:t>Transfer USD received from Stripe to Wise Balance directly</a:t>
+            </a:r>
+            <a:endParaRPr lang="en-TZ" sz="700" b="1" dirty="0">
+              <a:ln/>
+              <a:solidFill>
+                <a:schemeClr val="accent2">
+                  <a:lumMod val="50000"/>
+                </a:schemeClr>
+              </a:solidFill>
+            </a:endParaRPr>
+          </a:p>
+        </p:txBody>
+      </p:sp>
+      <p:sp>
+        <p:nvSpPr>
+          <p:cNvPr id="99" name="TextBox 98">
+            <a:extLst>
+              <a:ext uri="{FF2B5EF4-FFF2-40B4-BE49-F238E27FC236}">
+                <a16:creationId xmlns:a16="http://schemas.microsoft.com/office/drawing/2014/main" id="{C2CB717F-87E9-4EBE-A362-7AEB873402EA}"/>
+              </a:ext>
+            </a:extLst>
+          </p:cNvPr>
+          <p:cNvSpPr txBox="1"/>
+          <p:nvPr/>
+        </p:nvSpPr>
+        <p:spPr>
+          <a:xfrm>
+            <a:off x="7400571" y="3670309"/>
+            <a:ext cx="1097921" cy="523220"/>
+          </a:xfrm>
+          <a:prstGeom prst="rect">
+            <a:avLst/>
+          </a:prstGeom>
+          <a:noFill/>
+        </p:spPr>
+        <p:txBody>
+          <a:bodyPr wrap="square" rtlCol="0">
+            <a:spAutoFit/>
+          </a:bodyPr>
+          <a:lstStyle/>
+          <a:p>
+            <a:r>
+              <a:rPr lang="en-US" sz="700" dirty="0">
+                <a:solidFill>
+                  <a:schemeClr val="accent5">
+                    <a:lumMod val="75000"/>
+                  </a:schemeClr>
+                </a:solidFill>
+              </a:rPr>
+              <a:t>Davin is informed by Affiliate Program about amount of money need to transfer to Wise</a:t>
+            </a:r>
+            <a:endParaRPr lang="en-TZ" sz="700" dirty="0">
+              <a:solidFill>
+                <a:schemeClr val="accent5">
+                  <a:lumMod val="75000"/>
+                </a:schemeClr>
+              </a:solidFill>
+            </a:endParaRPr>
+          </a:p>
+        </p:txBody>
+      </p:sp>
+      <p:sp>
+        <p:nvSpPr>
+          <p:cNvPr id="100" name="TextBox 99">
+            <a:extLst>
+              <a:ext uri="{FF2B5EF4-FFF2-40B4-BE49-F238E27FC236}">
+                <a16:creationId xmlns:a16="http://schemas.microsoft.com/office/drawing/2014/main" id="{2E1C6C62-0200-4C11-AF24-BEC4ACE6DD1C}"/>
+              </a:ext>
+            </a:extLst>
+          </p:cNvPr>
+          <p:cNvSpPr txBox="1"/>
+          <p:nvPr/>
+        </p:nvSpPr>
+        <p:spPr>
+          <a:xfrm>
+            <a:off x="10176033" y="3392968"/>
+            <a:ext cx="1620512" cy="1200329"/>
+          </a:xfrm>
+          <a:prstGeom prst="rect">
+            <a:avLst/>
+          </a:prstGeom>
+          <a:noFill/>
+        </p:spPr>
+        <p:txBody>
+          <a:bodyPr wrap="square" rtlCol="0">
+            <a:spAutoFit/>
+            <a:scene3d>
+              <a:camera prst="orthographicFront"/>
+              <a:lightRig rig="soft" dir="t">
+                <a:rot lat="0" lon="0" rev="15600000"/>
+              </a:lightRig>
+            </a:scene3d>
+            <a:sp3d extrusionH="57150" prstMaterial="softEdge">
+              <a:bevelT w="25400" h="38100"/>
+            </a:sp3d>
+          </a:bodyPr>
+          <a:lstStyle/>
+          <a:p>
+            <a:r>
+              <a:rPr lang="en-US" sz="900" b="1" dirty="0">
+                <a:ln/>
+                <a:solidFill>
+                  <a:schemeClr val="accent2">
+                    <a:lumMod val="50000"/>
+                  </a:schemeClr>
+                </a:solidFill>
+              </a:rPr>
+              <a:t>Money sending to Bank’s Account of Affiliates</a:t>
+            </a:r>
+          </a:p>
+          <a:p>
+            <a:r>
+              <a:rPr lang="en-US" sz="900" b="1" dirty="0">
+                <a:ln/>
+                <a:solidFill>
+                  <a:schemeClr val="accent2">
+                    <a:lumMod val="50000"/>
+                  </a:schemeClr>
+                </a:solidFill>
+              </a:rPr>
+              <a:t>Note : 1) Disbursement is made as per schedule AND 2)</a:t>
+            </a:r>
+          </a:p>
+          <a:p>
+            <a:r>
+              <a:rPr lang="en-US" sz="900" b="1" dirty="0">
+                <a:ln/>
+                <a:solidFill>
+                  <a:schemeClr val="accent2">
+                    <a:lumMod val="50000"/>
+                  </a:schemeClr>
+                </a:solidFill>
+              </a:rPr>
+              <a:t>Affiliates are paid in local currencies and bear exchange rate difference and money transfer fees.</a:t>
+            </a:r>
+            <a:endParaRPr lang="en-TZ" sz="900" b="1" dirty="0">
+              <a:ln/>
+              <a:solidFill>
+                <a:schemeClr val="accent2">
+                  <a:lumMod val="50000"/>
+                </a:schemeClr>
+              </a:solidFill>
+            </a:endParaRPr>
+          </a:p>
+        </p:txBody>
+      </p:sp>
+      <p:cxnSp>
+        <p:nvCxnSpPr>
+          <p:cNvPr id="102" name="Straight Connector 101">
+            <a:extLst>
+              <a:ext uri="{FF2B5EF4-FFF2-40B4-BE49-F238E27FC236}">
+                <a16:creationId xmlns:a16="http://schemas.microsoft.com/office/drawing/2014/main" id="{3176D39E-CA40-4191-8B6B-423677B111F5}"/>
+              </a:ext>
+            </a:extLst>
+          </p:cNvPr>
+          <p:cNvCxnSpPr/>
+          <p:nvPr/>
+        </p:nvCxnSpPr>
+        <p:spPr>
+          <a:xfrm>
+            <a:off x="10739804" y="3069747"/>
+            <a:ext cx="0" cy="350109"/>
+          </a:xfrm>
+          <a:prstGeom prst="line">
+            <a:avLst/>
+          </a:prstGeom>
+        </p:spPr>
+        <p:style>
+          <a:lnRef idx="3">
+            <a:schemeClr val="accent2"/>
+          </a:lnRef>
+          <a:fillRef idx="0">
+            <a:schemeClr val="accent2"/>
+          </a:fillRef>
+          <a:effectRef idx="2">
+            <a:schemeClr val="accent2"/>
+          </a:effectRef>
+          <a:fontRef idx="minor">
+            <a:schemeClr val="tx1"/>
+          </a:fontRef>
+        </p:style>
+      </p:cxnSp>
+      <p:cxnSp>
+        <p:nvCxnSpPr>
+          <p:cNvPr id="104" name="Straight Arrow Connector 103">
+            <a:extLst>
+              <a:ext uri="{FF2B5EF4-FFF2-40B4-BE49-F238E27FC236}">
+                <a16:creationId xmlns:a16="http://schemas.microsoft.com/office/drawing/2014/main" id="{11923366-F862-43CB-9380-2D59BD8F8D74}"/>
+              </a:ext>
+            </a:extLst>
+          </p:cNvPr>
+          <p:cNvCxnSpPr>
+            <a:cxnSpLocks/>
+            <a:endCxn id="79" idx="0"/>
+          </p:cNvCxnSpPr>
+          <p:nvPr/>
+        </p:nvCxnSpPr>
+        <p:spPr>
+          <a:xfrm>
+            <a:off x="10774703" y="4593297"/>
+            <a:ext cx="0" cy="391173"/>
+          </a:xfrm>
+          <a:prstGeom prst="straightConnector1">
+            <a:avLst/>
+          </a:prstGeom>
+          <a:ln>
+            <a:tailEnd type="triangle"/>
+          </a:ln>
+        </p:spPr>
+        <p:style>
+          <a:lnRef idx="3">
+            <a:schemeClr val="accent2"/>
+          </a:lnRef>
+          <a:fillRef idx="0">
+            <a:schemeClr val="accent2"/>
+          </a:fillRef>
+          <a:effectRef idx="2">
+            <a:schemeClr val="accent2"/>
+          </a:effectRef>
+          <a:fontRef idx="minor">
+            <a:schemeClr val="tx1"/>
+          </a:fontRef>
+        </p:style>
+      </p:cxnSp>
+      <p:cxnSp>
+        <p:nvCxnSpPr>
+          <p:cNvPr id="47" name="Straight Arrow Connector 46">
+            <a:extLst>
+              <a:ext uri="{FF2B5EF4-FFF2-40B4-BE49-F238E27FC236}">
+                <a16:creationId xmlns:a16="http://schemas.microsoft.com/office/drawing/2014/main" id="{AC3A89D9-3D4F-4F12-8F5B-743625E2748E}"/>
+              </a:ext>
+            </a:extLst>
+          </p:cNvPr>
+          <p:cNvCxnSpPr>
+            <a:stCxn id="45" idx="0"/>
+          </p:cNvCxnSpPr>
+          <p:nvPr/>
+        </p:nvCxnSpPr>
+        <p:spPr>
+          <a:xfrm flipH="1" flipV="1">
+            <a:off x="9608389" y="2958612"/>
+            <a:ext cx="1" cy="263385"/>
+          </a:xfrm>
+          <a:prstGeom prst="straightConnector1">
+            <a:avLst/>
+          </a:prstGeom>
+          <a:ln>
+            <a:tailEnd type="triangle"/>
+          </a:ln>
+        </p:spPr>
+        <p:style>
+          <a:lnRef idx="3">
+            <a:schemeClr val="accent1"/>
+          </a:lnRef>
+          <a:fillRef idx="0">
+            <a:schemeClr val="accent1"/>
+          </a:fillRef>
+          <a:effectRef idx="2">
+            <a:schemeClr val="accent1"/>
+          </a:effectRef>
+          <a:fontRef idx="minor">
+            <a:schemeClr val="tx1"/>
+          </a:fontRef>
+        </p:style>
+      </p:cxnSp>
+      <p:sp>
+        <p:nvSpPr>
+          <p:cNvPr id="78" name="TextBox 77">
+            <a:extLst>
+              <a:ext uri="{FF2B5EF4-FFF2-40B4-BE49-F238E27FC236}">
+                <a16:creationId xmlns:a16="http://schemas.microsoft.com/office/drawing/2014/main" id="{7E4D933D-3794-4E87-BC3A-ED8AF873B206}"/>
+              </a:ext>
+            </a:extLst>
+          </p:cNvPr>
+          <p:cNvSpPr txBox="1"/>
+          <p:nvPr/>
+        </p:nvSpPr>
+        <p:spPr>
+          <a:xfrm>
+            <a:off x="9641983" y="2977332"/>
+            <a:ext cx="1208941" cy="307777"/>
+          </a:xfrm>
+          <a:prstGeom prst="rect">
+            <a:avLst/>
+          </a:prstGeom>
+          <a:noFill/>
+        </p:spPr>
+        <p:txBody>
+          <a:bodyPr wrap="square" rtlCol="0">
+            <a:spAutoFit/>
+          </a:bodyPr>
+          <a:lstStyle/>
+          <a:p>
+            <a:r>
+              <a:rPr lang="en-US" sz="700" dirty="0">
+                <a:solidFill>
+                  <a:schemeClr val="accent5">
+                    <a:lumMod val="75000"/>
+                  </a:schemeClr>
+                </a:solidFill>
+              </a:rPr>
+              <a:t>Operate Wise Balance account By Davin</a:t>
+            </a:r>
+            <a:endParaRPr lang="en-TZ" sz="700" dirty="0">
+              <a:solidFill>
+                <a:schemeClr val="accent5">
+                  <a:lumMod val="75000"/>
+                </a:schemeClr>
+              </a:solidFill>
+            </a:endParaRPr>
+          </a:p>
+        </p:txBody>
+      </p:sp>
+      <p:sp>
+        <p:nvSpPr>
+          <p:cNvPr id="80" name="TextBox 79">
+            <a:extLst>
+              <a:ext uri="{FF2B5EF4-FFF2-40B4-BE49-F238E27FC236}">
+                <a16:creationId xmlns:a16="http://schemas.microsoft.com/office/drawing/2014/main" id="{C974139D-EB60-4ED6-851E-19995D66C67D}"/>
+              </a:ext>
+            </a:extLst>
+          </p:cNvPr>
+          <p:cNvSpPr txBox="1"/>
+          <p:nvPr/>
+        </p:nvSpPr>
+        <p:spPr>
+          <a:xfrm rot="20568757">
+            <a:off x="6007917" y="3151686"/>
+            <a:ext cx="1745272" cy="307777"/>
+          </a:xfrm>
+          <a:prstGeom prst="rect">
+            <a:avLst/>
+          </a:prstGeom>
+          <a:noFill/>
+        </p:spPr>
+        <p:txBody>
+          <a:bodyPr wrap="square" rtlCol="0">
+            <a:spAutoFit/>
+            <a:scene3d>
+              <a:camera prst="orthographicFront"/>
+              <a:lightRig rig="soft" dir="t">
+                <a:rot lat="0" lon="0" rev="15600000"/>
+              </a:lightRig>
+            </a:scene3d>
+            <a:sp3d extrusionH="57150" prstMaterial="softEdge">
+              <a:bevelT w="25400" h="38100"/>
+            </a:sp3d>
+          </a:bodyPr>
+          <a:lstStyle/>
+          <a:p>
+            <a:r>
+              <a:rPr lang="en-US" sz="700" b="1" dirty="0">
+                <a:ln/>
+                <a:solidFill>
+                  <a:schemeClr val="accent2">
+                    <a:lumMod val="50000"/>
+                  </a:schemeClr>
+                </a:solidFill>
+              </a:rPr>
+              <a:t>Transfer USD received from </a:t>
+            </a:r>
+            <a:r>
+              <a:rPr lang="en-US" sz="700" b="1" dirty="0" err="1">
+                <a:ln/>
+                <a:solidFill>
+                  <a:schemeClr val="accent2">
+                    <a:lumMod val="50000"/>
+                  </a:schemeClr>
+                </a:solidFill>
+              </a:rPr>
+              <a:t>dLocal</a:t>
+            </a:r>
+            <a:r>
+              <a:rPr lang="en-US" sz="700" b="1" dirty="0">
+                <a:ln/>
+                <a:solidFill>
+                  <a:schemeClr val="accent2">
+                    <a:lumMod val="50000"/>
+                  </a:schemeClr>
+                </a:solidFill>
+              </a:rPr>
+              <a:t> to Wise Balance directly</a:t>
+            </a:r>
+            <a:endParaRPr lang="en-TZ" sz="700" b="1" dirty="0">
+              <a:ln/>
+              <a:solidFill>
+                <a:schemeClr val="accent2">
+                  <a:lumMod val="50000"/>
+                </a:schemeClr>
+              </a:solidFill>
+            </a:endParaRPr>
+          </a:p>
+        </p:txBody>
+      </p:sp>
+      <p:pic>
+        <p:nvPicPr>
+          <p:cNvPr id="82" name="Picture 81">
+            <a:extLst>
+              <a:ext uri="{FF2B5EF4-FFF2-40B4-BE49-F238E27FC236}">
+                <a16:creationId xmlns:a16="http://schemas.microsoft.com/office/drawing/2014/main" id="{AABF4D90-558F-4A09-ACE2-A97585BB3F9A}"/>
+              </a:ext>
+            </a:extLst>
+          </p:cNvPr>
+          <p:cNvPicPr>
+            <a:picLocks noChangeAspect="1"/>
+          </p:cNvPicPr>
+          <p:nvPr/>
+        </p:nvPicPr>
+        <p:blipFill>
+          <a:blip r:embed="rId3"/>
+          <a:stretch>
+            <a:fillRect/>
+          </a:stretch>
+        </p:blipFill>
+        <p:spPr>
+          <a:xfrm>
+            <a:off x="6880859" y="3648563"/>
+            <a:ext cx="594361" cy="594361"/>
+          </a:xfrm>
+          <a:prstGeom prst="rect">
+            <a:avLst/>
+          </a:prstGeom>
+        </p:spPr>
+      </p:pic>
+      <p:sp>
+        <p:nvSpPr>
+          <p:cNvPr id="83" name="Shape 11">
+            <a:extLst>
+              <a:ext uri="{FF2B5EF4-FFF2-40B4-BE49-F238E27FC236}">
+                <a16:creationId xmlns:a16="http://schemas.microsoft.com/office/drawing/2014/main" id="{BD5CF01E-D21C-41C4-BA06-3ADF663BD7D5}"/>
+              </a:ext>
+            </a:extLst>
+          </p:cNvPr>
+          <p:cNvSpPr/>
+          <p:nvPr/>
+        </p:nvSpPr>
+        <p:spPr>
+          <a:xfrm>
+            <a:off x="7967531" y="2973765"/>
+            <a:ext cx="0" cy="705356"/>
+          </a:xfrm>
+          <a:prstGeom prst="line">
+            <a:avLst/>
+          </a:prstGeom>
+          <a:ln>
+            <a:tailEnd type="triangle"/>
+          </a:ln>
+        </p:spPr>
+        <p:style>
+          <a:lnRef idx="3">
+            <a:schemeClr val="accent5"/>
+          </a:lnRef>
+          <a:fillRef idx="0">
+            <a:schemeClr val="accent5"/>
+          </a:fillRef>
+          <a:effectRef idx="2">
+            <a:schemeClr val="accent5"/>
+          </a:effectRef>
+          <a:fontRef idx="minor">
+            <a:schemeClr val="tx1"/>
+          </a:fontRef>
+        </p:style>
+      </p:sp>
+      <p:sp>
+        <p:nvSpPr>
+          <p:cNvPr id="85" name="TextBox 84">
+            <a:extLst>
+              <a:ext uri="{FF2B5EF4-FFF2-40B4-BE49-F238E27FC236}">
+                <a16:creationId xmlns:a16="http://schemas.microsoft.com/office/drawing/2014/main" id="{F27C3C40-7E81-430F-8321-72FBA51BA331}"/>
+              </a:ext>
+            </a:extLst>
+          </p:cNvPr>
+          <p:cNvSpPr txBox="1"/>
+          <p:nvPr/>
+        </p:nvSpPr>
+        <p:spPr>
+          <a:xfrm>
+            <a:off x="8119905" y="4317917"/>
+            <a:ext cx="914191" cy="307777"/>
+          </a:xfrm>
+          <a:prstGeom prst="rect">
+            <a:avLst/>
+          </a:prstGeom>
+          <a:noFill/>
+        </p:spPr>
+        <p:txBody>
+          <a:bodyPr wrap="square" rtlCol="0">
+            <a:spAutoFit/>
+            <a:scene3d>
+              <a:camera prst="orthographicFront"/>
+              <a:lightRig rig="soft" dir="t">
+                <a:rot lat="0" lon="0" rev="15600000"/>
+              </a:lightRig>
+            </a:scene3d>
+            <a:sp3d extrusionH="57150" prstMaterial="softEdge">
+              <a:bevelT w="25400" h="38100"/>
+            </a:sp3d>
+          </a:bodyPr>
+          <a:lstStyle/>
+          <a:p>
+            <a:r>
+              <a:rPr lang="en-US" sz="700" b="1" dirty="0">
+                <a:ln/>
+                <a:solidFill>
+                  <a:schemeClr val="accent2">
+                    <a:lumMod val="50000"/>
+                  </a:schemeClr>
+                </a:solidFill>
+              </a:rPr>
+              <a:t>USD remittance to Thai Bank Account</a:t>
+            </a:r>
+            <a:endParaRPr lang="en-TZ" sz="700" b="1" dirty="0">
+              <a:ln/>
+              <a:solidFill>
+                <a:schemeClr val="accent2">
+                  <a:lumMod val="50000"/>
+                </a:schemeClr>
+              </a:solidFill>
+            </a:endParaRPr>
+          </a:p>
+        </p:txBody>
+      </p:sp>
+    </p:spTree>
+    <p:extLst>
+      <p:ext uri="{BB962C8B-B14F-4D97-AF65-F5344CB8AC3E}">
+        <p14:creationId xmlns:p14="http://schemas.microsoft.com/office/powerpoint/2010/main" val="1745004833"/>
+      </p:ext>
+    </p:extLst>
   </p:cSld>
   <p:clrMapOvr>
     <a:masterClrMapping/>
